--- a/docs/2026-2학기-통계독서탐구-수행평가/발표예시-교육.pptx
+++ b/docs/2026-2학기-통계독서탐구-수행평가/발표예시-교육.pptx
@@ -114,7 +114,7 @@
   <p:extLst>
     <p:ext uri="{521415D9-36F7-43E2-AB2F-B90AF26B5E84}">
       <p14:sectionLst xmlns:p14="http://schemas.microsoft.com/office/powerpoint/2010/main">
-        <p14:section name="발표" id="{3d4982d0-3605-99da-e1bb-f898ad73d309}">
+        <p14:section name="발표" id="{a7cd4960-7d4f-14f9-30dd-f10498aac4e4}">
           <p14:sldIdLst>
             <p14:sldId id="256"/>
             <p14:sldId id="257"/>

--- a/docs/2026-2학기-통계독서탐구-수행평가/발표예시-교육.pptx
+++ b/docs/2026-2학기-통계독서탐구-수행평가/발표예시-교육.pptx
@@ -114,7 +114,7 @@
   <p:extLst>
     <p:ext uri="{521415D9-36F7-43E2-AB2F-B90AF26B5E84}">
       <p14:sectionLst xmlns:p14="http://schemas.microsoft.com/office/powerpoint/2010/main">
-        <p14:section name="발표" id="{a7cd4960-7d4f-14f9-30dd-f10498aac4e4}">
+        <p14:section name="발표" id="{c3172b89-0b50-be91-a43d-09cb2a506dd5}">
           <p14:sldIdLst>
             <p14:sldId id="256"/>
             <p14:sldId id="257"/>
@@ -2900,7 +2900,7 @@
                   <a:schemeClr val="tx1"/>
                 </a:solidFill>
               </a:rPr>
-              <a:t>교사가 되려면 한국어·다문화 교육을 지금부터 준비해야 한다.</a:t>
+              <a:t>교사를 지망하는 학생은 한국어·다문화 교육을 고민하고 대비해야 한다.</a:t>
             </a:r>
             <a:endParaRPr lang="en-US" sz="2400" dirty="0"/>
           </a:p>
@@ -3817,7 +3817,7 @@
                   <a:schemeClr val="tx1"/>
                 </a:solidFill>
               </a:rPr>
-              <a:t>1번 도서 20점: 도서명·저자 + 이어지는 내용</a:t>
+              <a:t>1번 도서 20점: 도서명·저자 + 책을 어떻게 썼는지 핵심</a:t>
             </a:r>
             <a:endParaRPr lang="en-US" sz="1050" dirty="0"/>
           </a:p>
@@ -4019,11 +4019,11 @@
         <p:spPr>
           <a:xfrm>
             <a:off x="457200" y="960120"/>
-            <a:ext cx="8229600" cy="868680"/>
+            <a:ext cx="8229600" cy="1051560"/>
           </a:xfrm>
           <a:prstGeom prst="roundRect">
             <a:avLst>
-              <a:gd name="adj" fmla="val 8421"/>
+              <a:gd name="adj" fmla="val 6957"/>
             </a:avLst>
           </a:prstGeom>
           <a:solidFill>
@@ -4045,8 +4045,8 @@
         </p:nvSpPr>
         <p:spPr>
           <a:xfrm>
-            <a:off x="640080" y="1024128"/>
-            <a:ext cx="7863840" cy="749808"/>
+            <a:off x="640080" y="1005840"/>
+            <a:ext cx="7863840" cy="960120"/>
           </a:xfrm>
           <a:prstGeom prst="rect">
             <a:avLst/>
@@ -4089,7 +4089,7 @@
                   <a:schemeClr val="tx1"/>
                 </a:solidFill>
               </a:rPr>
-              <a:t>대상: 전국 모든 유·초·중·고(매년 4월 1일 기준, 학교가 보고)</a:t>
+              <a:t>대상: 전국 모든 유·초·중·고(매년 4월 1일 기준, 학교가 보고) → 모두 조사(전수)</a:t>
             </a:r>
             <a:endParaRPr lang="en-US" sz="1100" dirty="0"/>
           </a:p>
@@ -4106,7 +4106,7 @@
                   <a:schemeClr val="tx1"/>
                 </a:solidFill>
               </a:rPr>
-              <a:t>조사 방식: 모두 조사(전수). 일부 학교를 뽑은 것이 아니다</a:t>
+              <a:t>얻는 길: kess.kedi.re.kr(교육통계서비스) → 교육통계연보 → '학생 수', '다문화 학생 수'  (교육부 보도자료 '교육기본통계 결과', 8월)</a:t>
             </a:r>
             <a:endParaRPr lang="en-US" sz="1100" dirty="0"/>
           </a:p>
@@ -4120,7 +4120,7 @@
         </p:nvSpPr>
         <p:spPr>
           <a:xfrm>
-            <a:off x="457200" y="1901952"/>
+            <a:off x="457200" y="2084832"/>
             <a:ext cx="4114800" cy="274320"/>
           </a:xfrm>
           <a:prstGeom prst="rect">
@@ -4163,7 +4163,7 @@
           </p:nvPr>
         </p:nvGraphicFramePr>
         <p:xfrm>
-          <a:off x="457200" y="2176272"/>
+          <a:off x="457200" y="2359152"/>
           <a:ext cx="4114800" cy="914400"/>
         </p:xfrm>
         <a:graphic>
@@ -7008,7 +7008,7 @@
         </p:nvSpPr>
         <p:spPr>
           <a:xfrm>
-            <a:off x="457200" y="3977640"/>
+            <a:off x="457200" y="4160520"/>
             <a:ext cx="4114800" cy="457200"/>
           </a:xfrm>
           <a:prstGeom prst="rect">
@@ -7044,7 +7044,7 @@
         </p:nvSpPr>
         <p:spPr>
           <a:xfrm>
-            <a:off x="4572000" y="2651760"/>
+            <a:off x="4572000" y="2834640"/>
             <a:ext cx="457200" cy="457200"/>
           </a:xfrm>
           <a:prstGeom prst="rect">
@@ -7082,7 +7082,7 @@
         </p:nvSpPr>
         <p:spPr>
           <a:xfrm>
-            <a:off x="5029200" y="1901952"/>
+            <a:off x="5029200" y="2084832"/>
             <a:ext cx="3657600" cy="274320"/>
           </a:xfrm>
           <a:prstGeom prst="rect">
@@ -7125,7 +7125,7 @@
           </p:nvPr>
         </p:nvGraphicFramePr>
         <p:xfrm>
-          <a:off x="5029200" y="2176272"/>
+          <a:off x="5029200" y="2359152"/>
           <a:ext cx="3657600" cy="914400"/>
         </p:xfrm>
         <a:graphic>
@@ -8566,7 +8566,7 @@
         </p:nvSpPr>
         <p:spPr>
           <a:xfrm>
-            <a:off x="5029200" y="3703320"/>
+            <a:off x="5029200" y="3886200"/>
             <a:ext cx="3657600" cy="548640"/>
           </a:xfrm>
           <a:prstGeom prst="rect">
@@ -8945,7 +8945,7 @@
                   <a:schemeClr val="tx2"/>
                 </a:solidFill>
               </a:rPr>
-              <a:t>얻는 길</a:t>
+              <a:t>얻는 길 (링크)</a:t>
             </a:r>
             <a:endParaRPr lang="en-US" sz="1150" dirty="0"/>
           </a:p>
@@ -8987,7 +8987,7 @@
                   <a:schemeClr val="tx1"/>
                 </a:solidFill>
               </a:rPr>
-              <a:t>교육통계서비스 kess.kedi.re.kr → 교육통계연보 → 학생 수, 다문화 학생 수</a:t>
+              <a:t>kess.kedi.re.kr → 교육통계연보 → 학생 수, 다문화 학생 수 (엑셀 내려받기)</a:t>
             </a:r>
             <a:endParaRPr lang="en-US" sz="1050" dirty="0"/>
           </a:p>
@@ -9005,7 +9005,7 @@
                   <a:schemeClr val="tx1"/>
                 </a:solidFill>
               </a:rPr>
-              <a:t>교육부 보도자료 '교육기본통계 결과'(8월)에 요약 표</a:t>
+              <a:t>moe.go.kr → 보도자료 '교육기본통계 결과'(8월)에 요약 표</a:t>
             </a:r>
             <a:endParaRPr lang="en-US" sz="1050" dirty="0"/>
           </a:p>
@@ -9269,7 +9269,7 @@
                   <a:schemeClr val="tx1"/>
                 </a:solidFill>
               </a:rPr>
-              <a:t>2-① 기관·조사 이름</a:t>
+              <a:t>출처(기관·조사 이름·링크)를 표현했는가</a:t>
             </a:r>
             <a:endParaRPr lang="en-US" sz="1050" dirty="0"/>
           </a:p>
@@ -9287,7 +9287,7 @@
                   <a:schemeClr val="tx1"/>
                 </a:solidFill>
               </a:rPr>
-              <a:t>2-② 전수의 근거: '전국 모든 학교가 보고'</a:t>
+              <a:t>모두 조사인지 밝혔는가: '전국 모든 학교가 보고'</a:t>
             </a:r>
             <a:endParaRPr lang="en-US" sz="1050" dirty="0"/>
           </a:p>
@@ -9305,7 +9305,7 @@
                   <a:schemeClr val="tx1"/>
                 </a:solidFill>
               </a:rPr>
-              <a:t>2-③ 필요한 행만 고르고 비율 열을 직접 계산</a:t>
+              <a:t>가공 전·후를 보였고 비율 열을 직접 계산했는가</a:t>
             </a:r>
             <a:endParaRPr lang="en-US" sz="1050" dirty="0"/>
           </a:p>
@@ -9488,7 +9488,7 @@
         </p:nvGraphicFramePr>
         <p:xfrm>
           <a:off x="457200" y="960120"/>
-          <a:ext cx="2621280" cy="1737360"/>
+          <a:ext cx="2621280" cy="2011680"/>
         </p:xfrm>
         <a:graphic xmlns:a="http://schemas.openxmlformats.org/drawingml/2006/main">
           <a:graphicData uri="http://schemas.openxmlformats.org/drawingml/2006/chart">
@@ -9504,7 +9504,7 @@
         </p:nvGraphicFramePr>
         <p:xfrm>
           <a:off x="3261360" y="960120"/>
-          <a:ext cx="2621280" cy="1737360"/>
+          <a:ext cx="2621280" cy="2011680"/>
         </p:xfrm>
         <a:graphic xmlns:a="http://schemas.openxmlformats.org/drawingml/2006/main">
           <a:graphicData uri="http://schemas.openxmlformats.org/drawingml/2006/chart">
@@ -9520,7 +9520,7 @@
         </p:nvGraphicFramePr>
         <p:xfrm>
           <a:off x="6065520" y="960120"/>
-          <a:ext cx="2621280" cy="1737360"/>
+          <a:ext cx="2621280" cy="2011680"/>
         </p:xfrm>
         <a:graphic xmlns:a="http://schemas.openxmlformats.org/drawingml/2006/main">
           <a:graphicData uri="http://schemas.openxmlformats.org/drawingml/2006/chart">
@@ -9530,602 +9530,18 @@
       </p:graphicFrame>
       <p:sp>
         <p:nvSpPr>
-          <p:cNvPr id="8" name="확률분포표 안내"/>
-          <p:cNvSpPr txBox="1"/>
-          <p:nvPr/>
-        </p:nvSpPr>
-        <p:spPr>
-          <a:xfrm>
-            <a:off x="457200" y="2743200"/>
-            <a:ext cx="8229600" cy="228600"/>
-          </a:xfrm>
-          <a:prstGeom prst="rect">
-            <a:avLst/>
-          </a:prstGeom>
-          <a:noFill/>
-          <a:ln/>
-        </p:spPr>
-        <p:txBody>
-          <a:bodyPr wrap="square" lIns="0" tIns="0" rIns="0" bIns="0" rtlCol="0" anchor="ctr"/>
-          <a:lstStyle/>
-          <a:p>
-            <a:pPr indent="0" marL="0">
-              <a:buNone/>
-            </a:pPr>
-            <a:r>
-              <a:rPr lang="en-US" sz="950" dirty="0">
-                <a:solidFill>
-                  <a:schemeClr val="accent3"/>
-                </a:solidFill>
-              </a:rPr>
-              <a:t>확률분포표 · 2025년 초·중등 학생 한 명을 뽑아 X = 다문화 학생이면 1, 아니면 0</a:t>
-            </a:r>
-            <a:endParaRPr lang="en-US" sz="950" dirty="0"/>
-          </a:p>
-        </p:txBody>
-      </p:sp>
-      <p:graphicFrame>
-        <p:nvGraphicFramePr>
-          <p:cNvPr id="6" name="확률분포표"/>
-          <p:cNvGraphicFramePr>
-            <a:graphicFrameLocks noGrp="1"/>
-          </p:cNvGraphicFramePr>
-          <p:nvPr>
-            <p:extLst>
-              <p:ext uri="{D42A27DB-BD31-4B8C-83A1-F6EECF244321}">
-                <p14:modId xmlns:p14="http://schemas.microsoft.com/office/powerpoint/2010/main" val="1579011935"/>
-              </p:ext>
-            </p:extLst>
-          </p:nvPr>
-        </p:nvGraphicFramePr>
-        <p:xfrm>
-          <a:off x="457200" y="2990088"/>
-          <a:ext cx="4572000" cy="914400"/>
-        </p:xfrm>
-        <a:graphic>
-          <a:graphicData uri="http://schemas.openxmlformats.org/drawingml/2006/table">
-            <a:tbl>
-              <a:tblPr/>
-              <a:tblGrid>
-                <a:gridCol w="822960"/>
-                <a:gridCol w="1371600"/>
-                <a:gridCol w="1463040"/>
-                <a:gridCol w="914400"/>
-              </a:tblGrid>
-              <a:tr h="237744">
-                <a:tc>
-                  <a:txBody>
-                    <a:bodyPr/>
-                    <a:lstStyle/>
-                    <a:p>
-                      <a:pPr algn="ctr" indent="0" marL="0">
-                        <a:buNone/>
-                      </a:pPr>
-                      <a:r>
-                        <a:rPr lang="en-US" sz="950" b="1" dirty="0">
-                          <a:solidFill>
-                            <a:srgbClr val="1B211D"/>
-                          </a:solidFill>
-                        </a:rPr>
-                        <a:t>X</a:t>
-                      </a:r>
-                      <a:endParaRPr lang="en-US" sz="950" dirty="0"/>
-                    </a:p>
-                  </a:txBody>
-                  <a:tcPr marL="27432" marR="27432" marT="27432" marB="27432" anchor="ctr">
-                    <a:lnL w="9525" cap="flat" cmpd="sng" algn="ctr">
-                      <a:solidFill>
-                        <a:srgbClr val="B9B4A6"/>
-                      </a:solidFill>
-                      <a:prstDash val="solid"/>
-                      <a:round/>
-                      <a:headEnd type="none" w="med" len="med"/>
-                      <a:tailEnd type="none" w="med" len="med"/>
-                    </a:lnL>
-                    <a:lnR w="9525" cap="flat" cmpd="sng" algn="ctr">
-                      <a:solidFill>
-                        <a:srgbClr val="B9B4A6"/>
-                      </a:solidFill>
-                      <a:prstDash val="solid"/>
-                      <a:round/>
-                      <a:headEnd type="none" w="med" len="med"/>
-                      <a:tailEnd type="none" w="med" len="med"/>
-                    </a:lnR>
-                    <a:lnT w="9525" cap="flat" cmpd="sng" algn="ctr">
-                      <a:solidFill>
-                        <a:srgbClr val="B9B4A6"/>
-                      </a:solidFill>
-                      <a:prstDash val="solid"/>
-                      <a:round/>
-                      <a:headEnd type="none" w="med" len="med"/>
-                      <a:tailEnd type="none" w="med" len="med"/>
-                    </a:lnT>
-                    <a:lnB w="9525" cap="flat" cmpd="sng" algn="ctr">
-                      <a:solidFill>
-                        <a:srgbClr val="B9B4A6"/>
-                      </a:solidFill>
-                      <a:prstDash val="solid"/>
-                      <a:round/>
-                      <a:headEnd type="none" w="med" len="med"/>
-                      <a:tailEnd type="none" w="med" len="med"/>
-                    </a:lnB>
-                    <a:solidFill>
-                      <a:srgbClr val="EEF3EF"/>
-                    </a:solidFill>
-                  </a:tcPr>
-                </a:tc>
-                <a:tc>
-                  <a:txBody>
-                    <a:bodyPr/>
-                    <a:lstStyle/>
-                    <a:p>
-                      <a:pPr algn="ctr" indent="0" marL="0">
-                        <a:buNone/>
-                      </a:pPr>
-                      <a:r>
-                        <a:rPr lang="en-US" sz="950" b="1" dirty="0">
-                          <a:solidFill>
-                            <a:srgbClr val="1B211D"/>
-                          </a:solidFill>
-                        </a:rPr>
-                        <a:t>0 (다문화 아님)</a:t>
-                      </a:r>
-                      <a:endParaRPr lang="en-US" sz="950" dirty="0"/>
-                    </a:p>
-                  </a:txBody>
-                  <a:tcPr marL="27432" marR="27432" marT="27432" marB="27432" anchor="ctr">
-                    <a:lnL w="9525" cap="flat" cmpd="sng" algn="ctr">
-                      <a:solidFill>
-                        <a:srgbClr val="B9B4A6"/>
-                      </a:solidFill>
-                      <a:prstDash val="solid"/>
-                      <a:round/>
-                      <a:headEnd type="none" w="med" len="med"/>
-                      <a:tailEnd type="none" w="med" len="med"/>
-                    </a:lnL>
-                    <a:lnR w="9525" cap="flat" cmpd="sng" algn="ctr">
-                      <a:solidFill>
-                        <a:srgbClr val="B9B4A6"/>
-                      </a:solidFill>
-                      <a:prstDash val="solid"/>
-                      <a:round/>
-                      <a:headEnd type="none" w="med" len="med"/>
-                      <a:tailEnd type="none" w="med" len="med"/>
-                    </a:lnR>
-                    <a:lnT w="9525" cap="flat" cmpd="sng" algn="ctr">
-                      <a:solidFill>
-                        <a:srgbClr val="B9B4A6"/>
-                      </a:solidFill>
-                      <a:prstDash val="solid"/>
-                      <a:round/>
-                      <a:headEnd type="none" w="med" len="med"/>
-                      <a:tailEnd type="none" w="med" len="med"/>
-                    </a:lnT>
-                    <a:lnB w="9525" cap="flat" cmpd="sng" algn="ctr">
-                      <a:solidFill>
-                        <a:srgbClr val="B9B4A6"/>
-                      </a:solidFill>
-                      <a:prstDash val="solid"/>
-                      <a:round/>
-                      <a:headEnd type="none" w="med" len="med"/>
-                      <a:tailEnd type="none" w="med" len="med"/>
-                    </a:lnB>
-                    <a:solidFill>
-                      <a:srgbClr val="EEF3EF"/>
-                    </a:solidFill>
-                  </a:tcPr>
-                </a:tc>
-                <a:tc>
-                  <a:txBody>
-                    <a:bodyPr/>
-                    <a:lstStyle/>
-                    <a:p>
-                      <a:pPr algn="ctr" indent="0" marL="0">
-                        <a:buNone/>
-                      </a:pPr>
-                      <a:r>
-                        <a:rPr lang="en-US" sz="950" b="1" dirty="0">
-                          <a:solidFill>
-                            <a:srgbClr val="1B211D"/>
-                          </a:solidFill>
-                        </a:rPr>
-                        <a:t>1 (다문화 학생)</a:t>
-                      </a:r>
-                      <a:endParaRPr lang="en-US" sz="950" dirty="0"/>
-                    </a:p>
-                  </a:txBody>
-                  <a:tcPr marL="27432" marR="27432" marT="27432" marB="27432" anchor="ctr">
-                    <a:lnL w="9525" cap="flat" cmpd="sng" algn="ctr">
-                      <a:solidFill>
-                        <a:srgbClr val="B9B4A6"/>
-                      </a:solidFill>
-                      <a:prstDash val="solid"/>
-                      <a:round/>
-                      <a:headEnd type="none" w="med" len="med"/>
-                      <a:tailEnd type="none" w="med" len="med"/>
-                    </a:lnL>
-                    <a:lnR w="9525" cap="flat" cmpd="sng" algn="ctr">
-                      <a:solidFill>
-                        <a:srgbClr val="B9B4A6"/>
-                      </a:solidFill>
-                      <a:prstDash val="solid"/>
-                      <a:round/>
-                      <a:headEnd type="none" w="med" len="med"/>
-                      <a:tailEnd type="none" w="med" len="med"/>
-                    </a:lnR>
-                    <a:lnT w="9525" cap="flat" cmpd="sng" algn="ctr">
-                      <a:solidFill>
-                        <a:srgbClr val="B9B4A6"/>
-                      </a:solidFill>
-                      <a:prstDash val="solid"/>
-                      <a:round/>
-                      <a:headEnd type="none" w="med" len="med"/>
-                      <a:tailEnd type="none" w="med" len="med"/>
-                    </a:lnT>
-                    <a:lnB w="9525" cap="flat" cmpd="sng" algn="ctr">
-                      <a:solidFill>
-                        <a:srgbClr val="B9B4A6"/>
-                      </a:solidFill>
-                      <a:prstDash val="solid"/>
-                      <a:round/>
-                      <a:headEnd type="none" w="med" len="med"/>
-                      <a:tailEnd type="none" w="med" len="med"/>
-                    </a:lnB>
-                    <a:solidFill>
-                      <a:srgbClr val="EEF3EF"/>
-                    </a:solidFill>
-                  </a:tcPr>
-                </a:tc>
-                <a:tc>
-                  <a:txBody>
-                    <a:bodyPr/>
-                    <a:lstStyle/>
-                    <a:p>
-                      <a:pPr algn="ctr" indent="0" marL="0">
-                        <a:buNone/>
-                      </a:pPr>
-                      <a:r>
-                        <a:rPr lang="en-US" sz="950" b="1" dirty="0">
-                          <a:solidFill>
-                            <a:srgbClr val="1B211D"/>
-                          </a:solidFill>
-                        </a:rPr>
-                        <a:t>합계</a:t>
-                      </a:r>
-                      <a:endParaRPr lang="en-US" sz="950" dirty="0"/>
-                    </a:p>
-                  </a:txBody>
-                  <a:tcPr marL="27432" marR="27432" marT="27432" marB="27432" anchor="ctr">
-                    <a:lnL w="9525" cap="flat" cmpd="sng" algn="ctr">
-                      <a:solidFill>
-                        <a:srgbClr val="B9B4A6"/>
-                      </a:solidFill>
-                      <a:prstDash val="solid"/>
-                      <a:round/>
-                      <a:headEnd type="none" w="med" len="med"/>
-                      <a:tailEnd type="none" w="med" len="med"/>
-                    </a:lnL>
-                    <a:lnR w="9525" cap="flat" cmpd="sng" algn="ctr">
-                      <a:solidFill>
-                        <a:srgbClr val="B9B4A6"/>
-                      </a:solidFill>
-                      <a:prstDash val="solid"/>
-                      <a:round/>
-                      <a:headEnd type="none" w="med" len="med"/>
-                      <a:tailEnd type="none" w="med" len="med"/>
-                    </a:lnR>
-                    <a:lnT w="9525" cap="flat" cmpd="sng" algn="ctr">
-                      <a:solidFill>
-                        <a:srgbClr val="B9B4A6"/>
-                      </a:solidFill>
-                      <a:prstDash val="solid"/>
-                      <a:round/>
-                      <a:headEnd type="none" w="med" len="med"/>
-                      <a:tailEnd type="none" w="med" len="med"/>
-                    </a:lnT>
-                    <a:lnB w="9525" cap="flat" cmpd="sng" algn="ctr">
-                      <a:solidFill>
-                        <a:srgbClr val="B9B4A6"/>
-                      </a:solidFill>
-                      <a:prstDash val="solid"/>
-                      <a:round/>
-                      <a:headEnd type="none" w="med" len="med"/>
-                      <a:tailEnd type="none" w="med" len="med"/>
-                    </a:lnB>
-                    <a:solidFill>
-                      <a:srgbClr val="EEF3EF"/>
-                    </a:solidFill>
-                  </a:tcPr>
-                </a:tc>
-              </a:tr>
-              <a:tr h="237744">
-                <a:tc>
-                  <a:txBody>
-                    <a:bodyPr/>
-                    <a:lstStyle/>
-                    <a:p>
-                      <a:pPr algn="ctr" indent="0" marL="0">
-                        <a:buNone/>
-                      </a:pPr>
-                      <a:r>
-                        <a:rPr lang="en-US" sz="950" dirty="0">
-                          <a:solidFill>
-                            <a:srgbClr val="1B211D"/>
-                          </a:solidFill>
-                        </a:rPr>
-                        <a:t>P(X = x)</a:t>
-                      </a:r>
-                      <a:endParaRPr lang="en-US" sz="950" dirty="0"/>
-                    </a:p>
-                  </a:txBody>
-                  <a:tcPr marL="27432" marR="27432" marT="27432" marB="27432" anchor="ctr">
-                    <a:lnL w="9525" cap="flat" cmpd="sng" algn="ctr">
-                      <a:solidFill>
-                        <a:srgbClr val="B9B4A6"/>
-                      </a:solidFill>
-                      <a:prstDash val="solid"/>
-                      <a:round/>
-                      <a:headEnd type="none" w="med" len="med"/>
-                      <a:tailEnd type="none" w="med" len="med"/>
-                    </a:lnL>
-                    <a:lnR w="9525" cap="flat" cmpd="sng" algn="ctr">
-                      <a:solidFill>
-                        <a:srgbClr val="B9B4A6"/>
-                      </a:solidFill>
-                      <a:prstDash val="solid"/>
-                      <a:round/>
-                      <a:headEnd type="none" w="med" len="med"/>
-                      <a:tailEnd type="none" w="med" len="med"/>
-                    </a:lnR>
-                    <a:lnT w="9525" cap="flat" cmpd="sng" algn="ctr">
-                      <a:solidFill>
-                        <a:srgbClr val="B9B4A6"/>
-                      </a:solidFill>
-                      <a:prstDash val="solid"/>
-                      <a:round/>
-                      <a:headEnd type="none" w="med" len="med"/>
-                      <a:tailEnd type="none" w="med" len="med"/>
-                    </a:lnT>
-                    <a:lnB w="9525" cap="flat" cmpd="sng" algn="ctr">
-                      <a:solidFill>
-                        <a:srgbClr val="B9B4A6"/>
-                      </a:solidFill>
-                      <a:prstDash val="solid"/>
-                      <a:round/>
-                      <a:headEnd type="none" w="med" len="med"/>
-                      <a:tailEnd type="none" w="med" len="med"/>
-                    </a:lnB>
-                  </a:tcPr>
-                </a:tc>
-                <a:tc>
-                  <a:txBody>
-                    <a:bodyPr/>
-                    <a:lstStyle/>
-                    <a:p>
-                      <a:pPr algn="ctr" indent="0" marL="0">
-                        <a:buNone/>
-                      </a:pPr>
-                      <a:r>
-                        <a:rPr lang="en-US" sz="950" dirty="0">
-                          <a:solidFill>
-                            <a:srgbClr val="1B211D"/>
-                          </a:solidFill>
-                        </a:rPr>
-                        <a:t>0.960</a:t>
-                      </a:r>
-                      <a:endParaRPr lang="en-US" sz="950" dirty="0"/>
-                    </a:p>
-                  </a:txBody>
-                  <a:tcPr marL="27432" marR="27432" marT="27432" marB="27432" anchor="ctr">
-                    <a:lnL w="9525" cap="flat" cmpd="sng" algn="ctr">
-                      <a:solidFill>
-                        <a:srgbClr val="B9B4A6"/>
-                      </a:solidFill>
-                      <a:prstDash val="solid"/>
-                      <a:round/>
-                      <a:headEnd type="none" w="med" len="med"/>
-                      <a:tailEnd type="none" w="med" len="med"/>
-                    </a:lnL>
-                    <a:lnR w="9525" cap="flat" cmpd="sng" algn="ctr">
-                      <a:solidFill>
-                        <a:srgbClr val="B9B4A6"/>
-                      </a:solidFill>
-                      <a:prstDash val="solid"/>
-                      <a:round/>
-                      <a:headEnd type="none" w="med" len="med"/>
-                      <a:tailEnd type="none" w="med" len="med"/>
-                    </a:lnR>
-                    <a:lnT w="9525" cap="flat" cmpd="sng" algn="ctr">
-                      <a:solidFill>
-                        <a:srgbClr val="B9B4A6"/>
-                      </a:solidFill>
-                      <a:prstDash val="solid"/>
-                      <a:round/>
-                      <a:headEnd type="none" w="med" len="med"/>
-                      <a:tailEnd type="none" w="med" len="med"/>
-                    </a:lnT>
-                    <a:lnB w="9525" cap="flat" cmpd="sng" algn="ctr">
-                      <a:solidFill>
-                        <a:srgbClr val="B9B4A6"/>
-                      </a:solidFill>
-                      <a:prstDash val="solid"/>
-                      <a:round/>
-                      <a:headEnd type="none" w="med" len="med"/>
-                      <a:tailEnd type="none" w="med" len="med"/>
-                    </a:lnB>
-                  </a:tcPr>
-                </a:tc>
-                <a:tc>
-                  <a:txBody>
-                    <a:bodyPr/>
-                    <a:lstStyle/>
-                    <a:p>
-                      <a:pPr algn="ctr" indent="0" marL="0">
-                        <a:buNone/>
-                      </a:pPr>
-                      <a:r>
-                        <a:rPr lang="en-US" sz="950" dirty="0">
-                          <a:solidFill>
-                            <a:srgbClr val="1B211D"/>
-                          </a:solidFill>
-                        </a:rPr>
-                        <a:t>0.040</a:t>
-                      </a:r>
-                      <a:endParaRPr lang="en-US" sz="950" dirty="0"/>
-                    </a:p>
-                  </a:txBody>
-                  <a:tcPr marL="27432" marR="27432" marT="27432" marB="27432" anchor="ctr">
-                    <a:lnL w="9525" cap="flat" cmpd="sng" algn="ctr">
-                      <a:solidFill>
-                        <a:srgbClr val="B9B4A6"/>
-                      </a:solidFill>
-                      <a:prstDash val="solid"/>
-                      <a:round/>
-                      <a:headEnd type="none" w="med" len="med"/>
-                      <a:tailEnd type="none" w="med" len="med"/>
-                    </a:lnL>
-                    <a:lnR w="9525" cap="flat" cmpd="sng" algn="ctr">
-                      <a:solidFill>
-                        <a:srgbClr val="B9B4A6"/>
-                      </a:solidFill>
-                      <a:prstDash val="solid"/>
-                      <a:round/>
-                      <a:headEnd type="none" w="med" len="med"/>
-                      <a:tailEnd type="none" w="med" len="med"/>
-                    </a:lnR>
-                    <a:lnT w="9525" cap="flat" cmpd="sng" algn="ctr">
-                      <a:solidFill>
-                        <a:srgbClr val="B9B4A6"/>
-                      </a:solidFill>
-                      <a:prstDash val="solid"/>
-                      <a:round/>
-                      <a:headEnd type="none" w="med" len="med"/>
-                      <a:tailEnd type="none" w="med" len="med"/>
-                    </a:lnT>
-                    <a:lnB w="9525" cap="flat" cmpd="sng" algn="ctr">
-                      <a:solidFill>
-                        <a:srgbClr val="B9B4A6"/>
-                      </a:solidFill>
-                      <a:prstDash val="solid"/>
-                      <a:round/>
-                      <a:headEnd type="none" w="med" len="med"/>
-                      <a:tailEnd type="none" w="med" len="med"/>
-                    </a:lnB>
-                  </a:tcPr>
-                </a:tc>
-                <a:tc>
-                  <a:txBody>
-                    <a:bodyPr/>
-                    <a:lstStyle/>
-                    <a:p>
-                      <a:pPr algn="ctr" indent="0" marL="0">
-                        <a:buNone/>
-                      </a:pPr>
-                      <a:r>
-                        <a:rPr lang="en-US" sz="950" dirty="0">
-                          <a:solidFill>
-                            <a:srgbClr val="1B211D"/>
-                          </a:solidFill>
-                        </a:rPr>
-                        <a:t>1</a:t>
-                      </a:r>
-                      <a:endParaRPr lang="en-US" sz="950" dirty="0"/>
-                    </a:p>
-                  </a:txBody>
-                  <a:tcPr marL="27432" marR="27432" marT="27432" marB="27432" anchor="ctr">
-                    <a:lnL w="9525" cap="flat" cmpd="sng" algn="ctr">
-                      <a:solidFill>
-                        <a:srgbClr val="B9B4A6"/>
-                      </a:solidFill>
-                      <a:prstDash val="solid"/>
-                      <a:round/>
-                      <a:headEnd type="none" w="med" len="med"/>
-                      <a:tailEnd type="none" w="med" len="med"/>
-                    </a:lnL>
-                    <a:lnR w="9525" cap="flat" cmpd="sng" algn="ctr">
-                      <a:solidFill>
-                        <a:srgbClr val="B9B4A6"/>
-                      </a:solidFill>
-                      <a:prstDash val="solid"/>
-                      <a:round/>
-                      <a:headEnd type="none" w="med" len="med"/>
-                      <a:tailEnd type="none" w="med" len="med"/>
-                    </a:lnR>
-                    <a:lnT w="9525" cap="flat" cmpd="sng" algn="ctr">
-                      <a:solidFill>
-                        <a:srgbClr val="B9B4A6"/>
-                      </a:solidFill>
-                      <a:prstDash val="solid"/>
-                      <a:round/>
-                      <a:headEnd type="none" w="med" len="med"/>
-                      <a:tailEnd type="none" w="med" len="med"/>
-                    </a:lnT>
-                    <a:lnB w="9525" cap="flat" cmpd="sng" algn="ctr">
-                      <a:solidFill>
-                        <a:srgbClr val="B9B4A6"/>
-                      </a:solidFill>
-                      <a:prstDash val="solid"/>
-                      <a:round/>
-                      <a:headEnd type="none" w="med" len="med"/>
-                      <a:tailEnd type="none" w="med" len="med"/>
-                    </a:lnB>
-                  </a:tcPr>
-                </a:tc>
-              </a:tr>
-            </a:tbl>
-          </a:graphicData>
-        </a:graphic>
-      </p:graphicFrame>
-      <p:sp>
-        <p:nvSpPr>
-          <p:cNvPr id="10" name="기댓값"/>
-          <p:cNvSpPr txBox="1"/>
-          <p:nvPr/>
-        </p:nvSpPr>
-        <p:spPr>
-          <a:xfrm>
-            <a:off x="5212080" y="3017520"/>
-            <a:ext cx="3474720" cy="457200"/>
-          </a:xfrm>
-          <a:prstGeom prst="rect">
-            <a:avLst/>
-          </a:prstGeom>
-          <a:noFill/>
-          <a:ln/>
-        </p:spPr>
-        <p:txBody>
-          <a:bodyPr wrap="square" lIns="0" tIns="0" rIns="0" bIns="0" rtlCol="0" anchor="ctr"/>
-          <a:lstStyle/>
-          <a:p>
-            <a:pPr indent="0" marL="0">
-              <a:buNone/>
-            </a:pPr>
-            <a:r>
-              <a:rPr lang="en-US" sz="950" dirty="0">
-                <a:solidFill>
-                  <a:schemeClr val="accent3"/>
-                </a:solidFill>
-              </a:rPr>
-              <a:t>30명 학급이면 기댓값 30 × 0.040 = 1.2명. 한 반에 평균 한 명이 넘는다</a:t>
-            </a:r>
-            <a:endParaRPr lang="en-US" sz="950" dirty="0"/>
-          </a:p>
-        </p:txBody>
-      </p:sp>
-      <p:sp>
-        <p:nvSpPr>
-          <p:cNvPr id="11" name="해석 카드 1"/>
+          <p:cNvPr id="8" name="해석 카드 1"/>
           <p:cNvSpPr/>
           <p:nvPr/>
         </p:nvSpPr>
         <p:spPr>
           <a:xfrm>
-            <a:off x="457200" y="3611880"/>
-            <a:ext cx="2651760" cy="960120"/>
+            <a:off x="457200" y="3108960"/>
+            <a:ext cx="2651760" cy="1417320"/>
           </a:xfrm>
           <a:prstGeom prst="roundRect">
             <a:avLst>
-              <a:gd name="adj" fmla="val 7619"/>
+              <a:gd name="adj" fmla="val 5161"/>
             </a:avLst>
           </a:prstGeom>
           <a:solidFill>
@@ -10141,13 +9557,13 @@
       </p:sp>
       <p:sp>
         <p:nvSpPr>
-          <p:cNvPr id="12" name="해석 라벨 1"/>
+          <p:cNvPr id="9" name="해석 라벨 1"/>
           <p:cNvSpPr txBox="1"/>
           <p:nvPr/>
         </p:nvSpPr>
         <p:spPr>
           <a:xfrm>
-            <a:off x="603504" y="3675888"/>
+            <a:off x="603504" y="3172968"/>
             <a:ext cx="2377440" cy="274320"/>
           </a:xfrm>
           <a:prstGeom prst="rect">
@@ -10177,14 +9593,14 @@
       </p:sp>
       <p:sp>
         <p:nvSpPr>
-          <p:cNvPr id="13" name="해석 1"/>
+          <p:cNvPr id="10" name="해석 1"/>
           <p:cNvSpPr txBox="1"/>
           <p:nvPr/>
         </p:nvSpPr>
         <p:spPr>
           <a:xfrm>
-            <a:off x="603504" y="3941064"/>
-            <a:ext cx="2377440" cy="576072"/>
+            <a:off x="603504" y="3438144"/>
+            <a:ext cx="2377440" cy="1033272"/>
           </a:xfrm>
           <a:prstGeom prst="rect">
             <a:avLst/>
@@ -10207,7 +9623,7 @@
                   <a:schemeClr val="tx1"/>
                 </a:solidFill>
               </a:rPr>
-              <a:t>다문화 16.0만 → 20.2만 명(+26%), 전체 532.3만 → 501.5만 명(−5.8%), 비율 3.0% → 4.0%(2021→2025)</a:t>
+              <a:t>다문화 16.0만 → 20.2만 명(+26%), 전체 532.3만 → 501.5만 명(−5.8%), 비율 3.0% → 4.0%(2021→2025). 30명 학급이면 평균 1.2명</a:t>
             </a:r>
             <a:endParaRPr lang="en-US" sz="950" dirty="0"/>
           </a:p>
@@ -10215,18 +9631,18 @@
       </p:sp>
       <p:sp>
         <p:nvSpPr>
-          <p:cNvPr id="14" name="해석 카드 2"/>
+          <p:cNvPr id="11" name="해석 카드 2"/>
           <p:cNvSpPr/>
           <p:nvPr/>
         </p:nvSpPr>
         <p:spPr>
           <a:xfrm>
-            <a:off x="3246120" y="3611880"/>
-            <a:ext cx="2651760" cy="960120"/>
+            <a:off x="3246120" y="3108960"/>
+            <a:ext cx="2651760" cy="1417320"/>
           </a:xfrm>
           <a:prstGeom prst="roundRect">
             <a:avLst>
-              <a:gd name="adj" fmla="val 7619"/>
+              <a:gd name="adj" fmla="val 5161"/>
             </a:avLst>
           </a:prstGeom>
           <a:solidFill>
@@ -10242,13 +9658,13 @@
       </p:sp>
       <p:sp>
         <p:nvSpPr>
-          <p:cNvPr id="15" name="해석 라벨 2"/>
+          <p:cNvPr id="12" name="해석 라벨 2"/>
           <p:cNvSpPr txBox="1"/>
           <p:nvPr/>
         </p:nvSpPr>
         <p:spPr>
           <a:xfrm>
-            <a:off x="3392424" y="3675888"/>
+            <a:off x="3392424" y="3172968"/>
             <a:ext cx="2377440" cy="274320"/>
           </a:xfrm>
           <a:prstGeom prst="rect">
@@ -10270,7 +9686,7 @@
                   <a:schemeClr val="tx2"/>
                 </a:solidFill>
               </a:rPr>
-              <a:t>② 왜 그렇게 되었을까, 내 의견</a:t>
+              <a:t>② 의견 또는 추측</a:t>
             </a:r>
             <a:endParaRPr lang="en-US" sz="1000" dirty="0"/>
           </a:p>
@@ -10278,14 +9694,14 @@
       </p:sp>
       <p:sp>
         <p:nvSpPr>
-          <p:cNvPr id="16" name="해석 2"/>
+          <p:cNvPr id="13" name="해석 2"/>
           <p:cNvSpPr txBox="1"/>
           <p:nvPr/>
         </p:nvSpPr>
         <p:spPr>
           <a:xfrm>
-            <a:off x="3392424" y="3941064"/>
-            <a:ext cx="2377440" cy="576072"/>
+            <a:off x="3392424" y="3438144"/>
+            <a:ext cx="2377440" cy="1033272"/>
           </a:xfrm>
           <a:prstGeom prst="rect">
             <a:avLst/>
@@ -10308,7 +9724,7 @@
                   <a:schemeClr val="tx1"/>
                 </a:solidFill>
               </a:rPr>
-              <a:t>국제결혼·외국인 가정 자녀가 취학 연령이 됐고, 출생아 감소로 전체 학생은 줄어 분자는 늘고 분모는 준다</a:t>
+              <a:t>국제결혼·외국인 가정 자녀가 취학 연령이 됐고 전체 학생은 줄어, 비율은 앞으로 더 빨리 오를 것이라고 추측한다. 분자는 늘고 분모는 준다</a:t>
             </a:r>
             <a:endParaRPr lang="en-US" sz="950" dirty="0"/>
           </a:p>
@@ -10316,18 +9732,18 @@
       </p:sp>
       <p:sp>
         <p:nvSpPr>
-          <p:cNvPr id="17" name="해석 카드 3"/>
+          <p:cNvPr id="14" name="해석 카드 3"/>
           <p:cNvSpPr/>
           <p:nvPr/>
         </p:nvSpPr>
         <p:spPr>
           <a:xfrm>
-            <a:off x="6035040" y="3611880"/>
-            <a:ext cx="2651760" cy="960120"/>
+            <a:off x="6035040" y="3108960"/>
+            <a:ext cx="2651760" cy="1417320"/>
           </a:xfrm>
           <a:prstGeom prst="roundRect">
             <a:avLst>
-              <a:gd name="adj" fmla="val 7619"/>
+              <a:gd name="adj" fmla="val 5161"/>
             </a:avLst>
           </a:prstGeom>
           <a:solidFill>
@@ -10343,13 +9759,13 @@
       </p:sp>
       <p:sp>
         <p:nvSpPr>
-          <p:cNvPr id="18" name="해석 라벨 3"/>
+          <p:cNvPr id="15" name="해석 라벨 3"/>
           <p:cNvSpPr txBox="1"/>
           <p:nvPr/>
         </p:nvSpPr>
         <p:spPr>
           <a:xfrm>
-            <a:off x="6181344" y="3675888"/>
+            <a:off x="6181344" y="3172968"/>
             <a:ext cx="2377440" cy="274320"/>
           </a:xfrm>
           <a:prstGeom prst="rect">
@@ -10371,7 +9787,7 @@
                   <a:schemeClr val="tx2"/>
                 </a:solidFill>
               </a:rPr>
-              <a:t>③ 내 의견의 근거</a:t>
+              <a:t>③ 의견·추측의 근거</a:t>
             </a:r>
             <a:endParaRPr lang="en-US" sz="1000" dirty="0"/>
           </a:p>
@@ -10379,14 +9795,14 @@
       </p:sp>
       <p:sp>
         <p:nvSpPr>
-          <p:cNvPr id="19" name="해석 3"/>
+          <p:cNvPr id="16" name="해석 3"/>
           <p:cNvSpPr txBox="1"/>
           <p:nvPr/>
         </p:nvSpPr>
         <p:spPr>
           <a:xfrm>
-            <a:off x="6181344" y="3941064"/>
-            <a:ext cx="2377440" cy="576072"/>
+            <a:off x="6181344" y="3438144"/>
+            <a:ext cx="2377440" cy="1033272"/>
           </a:xfrm>
           <a:prstGeom prst="rect">
             <a:avLst/>
@@ -10409,7 +9825,7 @@
                   <a:schemeClr val="tx1"/>
                 </a:solidFill>
               </a:rPr>
-              <a:t>2024→2025만 봐도 다문화 +8,394명(+4.3%), 전체 −11.7만 명(−2.3%). 한쪽이 늘고 한쪽이 줄면 비율은 반드시 오른다</a:t>
+              <a:t>2024→2025만 봐도 다문화 +8,394명(+4.3%), 전체 −11.7만 명(−2.3%). 한쪽이 늘고 한쪽이 줄면 비율은 반드시 오른다(분모 효과)</a:t>
             </a:r>
             <a:endParaRPr lang="en-US" sz="950" dirty="0"/>
           </a:p>
@@ -10784,7 +10200,7 @@
                   <a:schemeClr val="tx2"/>
                 </a:solidFill>
               </a:rPr>
-              <a:t>확률분포표</a:t>
+              <a:t>학급 단위로 바꾸기</a:t>
             </a:r>
             <a:endParaRPr lang="en-US" sz="1150" dirty="0"/>
           </a:p>
@@ -10826,7 +10242,7 @@
                   <a:schemeClr val="tx1"/>
                 </a:solidFill>
               </a:rPr>
-              <a:t>비율 4.0% → 한 명을 뽑을 때 다문화 학생일 확률 0.040</a:t>
+              <a:t>비율 4.0% × 30명 = 1.2명 → "한 반에 평균 한 명 이상"으로 읽는다</a:t>
             </a:r>
             <a:endParaRPr lang="en-US" sz="1050" dirty="0"/>
           </a:p>
@@ -10844,7 +10260,7 @@
                   <a:schemeClr val="tx1"/>
                 </a:solidFill>
               </a:rPr>
-              <a:t>30명 학급의 기댓값 1.2명 → '한 반에 평균 한 명 이상'으로 읽는다</a:t>
+              <a:t>확률분포표 없이도 비율로 바로 계산할 수 있다</a:t>
             </a:r>
             <a:endParaRPr lang="en-US" sz="1050" dirty="0"/>
           </a:p>
@@ -10907,7 +10323,7 @@
                   <a:schemeClr val="tx2"/>
                 </a:solidFill>
               </a:rPr>
-              <a:t>근거는 같은 통계 안에서</a:t>
+              <a:t>의견과 근거를 잇는 법</a:t>
             </a:r>
             <a:endParaRPr lang="en-US" sz="1150" dirty="0"/>
           </a:p>
@@ -10949,7 +10365,7 @@
                   <a:schemeClr val="tx1"/>
                 </a:solidFill>
               </a:rPr>
-              <a:t>전체 학생 수(분모)의 변화를 같은 통계에서 가져왔다</a:t>
+              <a:t>②는 추측: '비율은 앞으로 더 빨리 오른다'</a:t>
             </a:r>
             <a:endParaRPr lang="en-US" sz="1050" dirty="0"/>
           </a:p>
@@ -10967,7 +10383,25 @@
                   <a:schemeClr val="tx1"/>
                 </a:solidFill>
               </a:rPr>
-              <a:t>2024→2025: 다문화 +4.3%, 전체 −2.3%</a:t>
+              <a:t>③은 근거: 같은 통계의 전체 학생 수(분모) 변화, 2024→2025 증감</a:t>
+            </a:r>
+            <a:endParaRPr lang="en-US" sz="1050" dirty="0"/>
+          </a:p>
+          <a:p>
+            <a:pPr marL="342900" indent="-342900">
+              <a:spcAft>
+                <a:spcPts val="300"/>
+              </a:spcAft>
+              <a:buSzPct val="100000"/>
+              <a:buChar char="•"/>
+            </a:pPr>
+            <a:r>
+              <a:rPr lang="en-US" sz="1050" dirty="0">
+                <a:solidFill>
+                  <a:schemeClr val="tx1"/>
+                </a:solidFill>
+              </a:rPr>
+              <a:t>분모가 줄고 분자가 늘면 비율은 반드시 오른다는 계산으로 잇는다</a:t>
             </a:r>
             <a:endParaRPr lang="en-US" sz="1050" dirty="0"/>
           </a:p>
@@ -11072,7 +10506,7 @@
                   <a:schemeClr val="tx1"/>
                 </a:solidFill>
               </a:rPr>
-              <a:t>2-④ 그래프와 확률분포표</a:t>
+              <a:t>수·전체·비율의 변화를 모두 숫자로 표현했는가(①)</a:t>
             </a:r>
             <a:endParaRPr lang="en-US" sz="1050" dirty="0"/>
           </a:p>
@@ -11090,7 +10524,7 @@
                   <a:schemeClr val="tx1"/>
                 </a:solidFill>
               </a:rPr>
-              <a:t>3-① 수·전체·비율의 변화를 모두 숫자로  3-② 의견</a:t>
+              <a:t>가공된 자료로 추측을 했는가(②)</a:t>
             </a:r>
             <a:endParaRPr lang="en-US" sz="1050" dirty="0"/>
           </a:p>
@@ -11108,7 +10542,7 @@
                   <a:schemeClr val="tx1"/>
                 </a:solidFill>
               </a:rPr>
-              <a:t>3-③ 분모의 변화를 근거로(엘렌버그)</a:t>
+              <a:t>추측의 근거가 있는가(③, 분모의 변화)</a:t>
             </a:r>
             <a:endParaRPr lang="en-US" sz="1050" dirty="0"/>
           </a:p>
@@ -11441,7 +10875,7 @@
                   <a:schemeClr val="tx2"/>
                 </a:solidFill>
               </a:rPr>
-              <a:t>그래서 나의 주장</a:t>
+              <a:t>통계 분석</a:t>
             </a:r>
             <a:endParaRPr lang="en-US" sz="1100" dirty="0"/>
           </a:p>
@@ -11479,7 +10913,7 @@
                   <a:schemeClr val="tx1"/>
                 </a:solidFill>
               </a:rPr>
-              <a:t>지금 추세(다문화 해마다 약 1만 명 증가, 전체 약 7.7만 명 감소)가 이어지면 2030년에는 다문화 약 25.5만 명, 전체 약 463만 명으로 비율 5.5%, 30명 학급에 1.6명이다. 교사가 되려면 한국어 교육과 다문화 교육 역량을 지금부터 준비해야 한다.</a:t>
+              <a:t>지금 추세(다문화 해마다 약 1만 명 증가, 전체 약 7.7만 명 감소)가 이어지면 2030년에는 다문화 약 25.5만 명, 전체 약 463만 명으로 비율 5.5%, 30명 학급에 1.6명이다. 교사를 지망하는 학생은 한국어·다문화 교육을 고민하고 대비해야 한다.</a:t>
             </a:r>
             <a:endParaRPr lang="en-US" sz="1300" dirty="0"/>
           </a:p>
@@ -11542,7 +10976,7 @@
                   <a:schemeClr val="tx2"/>
                 </a:solidFill>
               </a:rPr>
-              <a:t>제안</a:t>
+              <a:t>결론</a:t>
             </a:r>
             <a:endParaRPr lang="en-US" sz="1100" dirty="0"/>
           </a:p>
@@ -11580,7 +11014,7 @@
                   <a:schemeClr val="tx1"/>
                 </a:solidFill>
               </a:rPr>
-              <a:t>교대에 가면 다문화 교육·한국어(KSL) 교육 과목을 이수한다. 지금은 우리 학교의 한국어 학급이나 다문화 학생 멘토링 봉사에 참여해 교실을 미리 경험한다.</a:t>
+              <a:t>나는 교육대학 진학을 희망하며, 진학하면 다문화 교육과 한국어(KSL) 교육 과목을 이수하겠다. 지금은 우리 학교의 한국어 학급이나 다문화 학생 멘토링 봉사에 참여해 교실을 미리 경험하겠다.</a:t>
             </a:r>
             <a:endParaRPr lang="en-US" sz="1300" dirty="0"/>
           </a:p>
@@ -11856,7 +11290,7 @@
                   <a:schemeClr val="tx1"/>
                 </a:solidFill>
               </a:rPr>
-              <a:t>보여 준 것(5년의 변화를 숫자로) → 주장(전망 + 준비) → 제안(내가 할 일)</a:t>
+              <a:t>통계가 보여 준 것(5년의 변화를 숫자로) → 통계 분석(전망 + 대비) → 결론(내가 할 일)</a:t>
             </a:r>
             <a:endParaRPr lang="en-US" sz="1050" dirty="0"/>
           </a:p>

--- a/docs/2026-2학기-통계독서탐구-수행평가/발표예시-교육.pptx
+++ b/docs/2026-2학기-통계독서탐구-수행평가/발표예시-교육.pptx
@@ -114,7 +114,7 @@
   <p:extLst>
     <p:ext uri="{521415D9-36F7-43E2-AB2F-B90AF26B5E84}">
       <p14:sectionLst xmlns:p14="http://schemas.microsoft.com/office/powerpoint/2010/main">
-        <p14:section name="발표" id="{c3172b89-0b50-be91-a43d-09cb2a506dd5}">
+        <p14:section name="발표" id="{9c8949c8-99b5-b348-f511-02c057e1bdc6}">
           <p14:sldIdLst>
             <p14:sldId id="256"/>
             <p14:sldId id="257"/>
@@ -3154,7 +3154,7 @@
                   <a:schemeClr val="tx1"/>
                 </a:solidFill>
               </a:rPr>
-              <a:t>숫자보다 '무엇에 대한 비율인지'를 보라는 말을 따라 다문화 학생 수·전체 학생 수·비율을 함께 봤다</a:t>
+              <a:t>'무엇에 대한 비율인지'를 보라는 조언을 따라 다문화 학생 수·전체 학생 수·비율을 함께 봤다</a:t>
             </a:r>
             <a:endParaRPr lang="en-US" sz="1150" dirty="0"/>
           </a:p>
@@ -3430,7 +3430,7 @@
                   <a:schemeClr val="tx1"/>
                 </a:solidFill>
               </a:rPr>
-              <a:t>주장 한 문장과 참고 도서 한 권</a:t>
+              <a:t>통계로 받친 주장 한 문장 + 통계 활동에 조언을 얻은 책 한 권</a:t>
             </a:r>
             <a:endParaRPr lang="en-US" sz="1050" dirty="0"/>
           </a:p>
@@ -3529,7 +3529,7 @@
                   <a:schemeClr val="tx2"/>
                 </a:solidFill>
               </a:rPr>
-              <a:t>책과의 연결</a:t>
+              <a:t>책에서 얻은 조언 (통계 활동용)</a:t>
             </a:r>
             <a:endParaRPr lang="en-US" sz="1150" dirty="0"/>
           </a:p>
@@ -3571,7 +3571,7 @@
                   <a:schemeClr val="tx1"/>
                 </a:solidFill>
               </a:rPr>
-              <a:t>엘렌버그: 숫자보다 '무엇에 대한 비율인지'(분모)를 보라</a:t>
+              <a:t>조언: 숫자보다 '무엇에 대한 비율인지'(분모)를 보라 → 분자·분모·비율을 모두 표에 넣음(2장)</a:t>
             </a:r>
             <a:endParaRPr lang="en-US" sz="1050" dirty="0"/>
           </a:p>
@@ -3589,7 +3589,25 @@
                   <a:schemeClr val="tx1"/>
                 </a:solidFill>
               </a:rPr>
-              <a:t>다문화 학생 수(분자)와 전체 학생 수(분모)를 둘 다 표에 넣은 이유</a:t>
+              <a:t>비율을 직접 계산해 원자료와 맞는지 확인(2장)</a:t>
+            </a:r>
+            <a:endParaRPr lang="en-US" sz="1050" dirty="0"/>
+          </a:p>
+          <a:p>
+            <a:pPr marL="342900" indent="-342900">
+              <a:spcAft>
+                <a:spcPts val="300"/>
+              </a:spcAft>
+              <a:buSzPct val="100000"/>
+              <a:buChar char="•"/>
+            </a:pPr>
+            <a:r>
+              <a:rPr lang="en-US" sz="1050" dirty="0">
+                <a:solidFill>
+                  <a:schemeClr val="tx1"/>
+                </a:solidFill>
+              </a:rPr>
+              <a:t>주장은 책이 아니라 교육기본통계에서 나왔다</a:t>
             </a:r>
             <a:endParaRPr lang="en-US" sz="1050" dirty="0"/>
           </a:p>
@@ -3817,7 +3835,7 @@
                   <a:schemeClr val="tx1"/>
                 </a:solidFill>
               </a:rPr>
-              <a:t>1번 도서 20점: 도서명·저자 + 책을 어떻게 썼는지 핵심</a:t>
+              <a:t>1번 도서 20점: 도서명·저자 + 통계 활동에 얻은 조언</a:t>
             </a:r>
             <a:endParaRPr lang="en-US" sz="1050" dirty="0"/>
           </a:p>
@@ -3835,7 +3853,7 @@
                   <a:schemeClr val="tx1"/>
                 </a:solidFill>
               </a:rPr>
-              <a:t>책의 생각(분모)이 2장의 표 구성과 3장의 해석으로 이어진다</a:t>
+              <a:t>책의 조언(분모)이 2장의 표 구성과 3장의 해석에 쓰였다</a:t>
             </a:r>
             <a:endParaRPr lang="en-US" sz="1050" dirty="0"/>
           </a:p>

--- a/docs/2026-2학기-통계독서탐구-수행평가/발표예시-교육.pptx
+++ b/docs/2026-2학기-통계독서탐구-수행평가/발표예시-교육.pptx
@@ -9,13 +9,9 @@
     <p:sldId id="257" r:id="rId3"/>
     <p:sldId id="258" r:id="rId4"/>
     <p:sldId id="259" r:id="rId5"/>
-    <p:sldId id="260" r:id="rId6"/>
-    <p:sldId id="261" r:id="rId7"/>
-    <p:sldId id="262" r:id="rId8"/>
-    <p:sldId id="263" r:id="rId9"/>
   </p:sldIdLst>
   <p:notesMasterIdLst>
-    <p:notesMasterId r:id="rId10"/>
+    <p:notesMasterId r:id="rId6"/>
   </p:notesMasterIdLst>
   <p:sldSz cx="9144000" cy="5143500"/>
   <p:notesSz cx="5143500" cy="9144000"/>
@@ -114,16 +110,12 @@
   <p:extLst>
     <p:ext uri="{521415D9-36F7-43E2-AB2F-B90AF26B5E84}">
       <p14:sectionLst xmlns:p14="http://schemas.microsoft.com/office/powerpoint/2010/main">
-        <p14:section name="발표" id="{9c8949c8-99b5-b348-f511-02c057e1bdc6}">
+        <p14:section name="발표" id="{38344d20-bb7f-3519-4911-00ffbfea2dc4}">
           <p14:sldIdLst>
             <p14:sldId id="256"/>
             <p14:sldId id="257"/>
             <p14:sldId id="258"/>
             <p14:sldId id="259"/>
-            <p14:sldId id="260"/>
-            <p14:sldId id="261"/>
-            <p14:sldId id="262"/>
-            <p14:sldId id="263"/>
           </p14:sldIdLst>
         </p14:section>
       </p14:sectionLst>
@@ -1712,358 +1704,6 @@
 </p:notes>
 </file>
 
-<file path=ppt/notesSlides/notesSlide5.xml><?xml version="1.0" encoding="utf-8"?>
-<p:notes xmlns:a="http://schemas.openxmlformats.org/drawingml/2006/main" xmlns:r="http://schemas.openxmlformats.org/officeDocument/2006/relationships" xmlns:p="http://schemas.openxmlformats.org/presentationml/2006/main">
-  <p:cSld>
-    <p:spTree>
-      <p:nvGrpSpPr>
-        <p:cNvPr id="1" name=""/>
-        <p:cNvGrpSpPr/>
-        <p:nvPr/>
-      </p:nvGrpSpPr>
-      <p:grpSpPr>
-        <a:xfrm>
-          <a:off x="0" y="0"/>
-          <a:ext cx="0" cy="0"/>
-          <a:chOff x="0" y="0"/>
-          <a:chExt cx="0" cy="0"/>
-        </a:xfrm>
-      </p:grpSpPr>
-      <p:sp>
-        <p:nvSpPr>
-          <p:cNvPr id="2" name="Slide Image Placeholder 1"/>
-          <p:cNvSpPr>
-            <a:spLocks noGrp="1" noRot="1" noChangeAspect="1"/>
-          </p:cNvSpPr>
-          <p:nvPr>
-            <p:ph type="sldImg"/>
-          </p:nvPr>
-        </p:nvSpPr>
-        <p:spPr/>
-      </p:sp>
-      <p:sp>
-        <p:nvSpPr>
-          <p:cNvPr id="3" name="Notes Placeholder 2"/>
-          <p:cNvSpPr>
-            <a:spLocks noGrp="1"/>
-          </p:cNvSpPr>
-          <p:nvPr>
-            <p:ph type="body" idx="1"/>
-          </p:nvPr>
-        </p:nvSpPr>
-        <p:spPr/>
-        <p:txBody>
-          <a:bodyPr/>
-          <a:lstStyle/>
-          <a:p>
-            <a:r>
-              <a:rPr lang="en-US" dirty="0"/>
-              <a:t/>
-            </a:r>
-            <a:endParaRPr lang="en-US" dirty="0"/>
-          </a:p>
-        </p:txBody>
-      </p:sp>
-      <p:sp>
-        <p:nvSpPr>
-          <p:cNvPr id="4" name="Slide Number Placeholder 3"/>
-          <p:cNvSpPr>
-            <a:spLocks noGrp="1"/>
-          </p:cNvSpPr>
-          <p:nvPr>
-            <p:ph type="sldNum" sz="quarter" idx="10"/>
-          </p:nvPr>
-        </p:nvSpPr>
-        <p:spPr/>
-        <p:txBody>
-          <a:bodyPr/>
-          <a:lstStyle/>
-          <a:p>
-            <a:fld id="{F7021451-1387-4CA6-816F-3879F97B5CBC}" type="slidenum">
-              <a:rPr lang="en-US"/>
-              <a:t>5</a:t>
-            </a:fld>
-            <a:endParaRPr lang="en-US"/>
-          </a:p>
-        </p:txBody>
-      </p:sp>
-    </p:spTree>
-    <p:extLst>
-      <p:ext uri="{BB962C8B-B14F-4D97-AF65-F5344CB8AC3E}">
-        <p14:creationId xmlns:p14="http://schemas.microsoft.com/office/powerpoint/2010/main" val="1024086991"/>
-      </p:ext>
-    </p:extLst>
-  </p:cSld>
-  <p:clrMapOvr>
-    <a:masterClrMapping/>
-  </p:clrMapOvr>
-</p:notes>
-</file>
-
-<file path=ppt/notesSlides/notesSlide6.xml><?xml version="1.0" encoding="utf-8"?>
-<p:notes xmlns:a="http://schemas.openxmlformats.org/drawingml/2006/main" xmlns:r="http://schemas.openxmlformats.org/officeDocument/2006/relationships" xmlns:p="http://schemas.openxmlformats.org/presentationml/2006/main">
-  <p:cSld>
-    <p:spTree>
-      <p:nvGrpSpPr>
-        <p:cNvPr id="1" name=""/>
-        <p:cNvGrpSpPr/>
-        <p:nvPr/>
-      </p:nvGrpSpPr>
-      <p:grpSpPr>
-        <a:xfrm>
-          <a:off x="0" y="0"/>
-          <a:ext cx="0" cy="0"/>
-          <a:chOff x="0" y="0"/>
-          <a:chExt cx="0" cy="0"/>
-        </a:xfrm>
-      </p:grpSpPr>
-      <p:sp>
-        <p:nvSpPr>
-          <p:cNvPr id="2" name="Slide Image Placeholder 1"/>
-          <p:cNvSpPr>
-            <a:spLocks noGrp="1" noRot="1" noChangeAspect="1"/>
-          </p:cNvSpPr>
-          <p:nvPr>
-            <p:ph type="sldImg"/>
-          </p:nvPr>
-        </p:nvSpPr>
-        <p:spPr/>
-      </p:sp>
-      <p:sp>
-        <p:nvSpPr>
-          <p:cNvPr id="3" name="Notes Placeholder 2"/>
-          <p:cNvSpPr>
-            <a:spLocks noGrp="1"/>
-          </p:cNvSpPr>
-          <p:nvPr>
-            <p:ph type="body" idx="1"/>
-          </p:nvPr>
-        </p:nvSpPr>
-        <p:spPr/>
-        <p:txBody>
-          <a:bodyPr/>
-          <a:lstStyle/>
-          <a:p>
-            <a:r>
-              <a:rPr lang="en-US" dirty="0"/>
-              <a:t/>
-            </a:r>
-            <a:endParaRPr lang="en-US" dirty="0"/>
-          </a:p>
-        </p:txBody>
-      </p:sp>
-      <p:sp>
-        <p:nvSpPr>
-          <p:cNvPr id="4" name="Slide Number Placeholder 3"/>
-          <p:cNvSpPr>
-            <a:spLocks noGrp="1"/>
-          </p:cNvSpPr>
-          <p:nvPr>
-            <p:ph type="sldNum" sz="quarter" idx="10"/>
-          </p:nvPr>
-        </p:nvSpPr>
-        <p:spPr/>
-        <p:txBody>
-          <a:bodyPr/>
-          <a:lstStyle/>
-          <a:p>
-            <a:fld id="{F7021451-1387-4CA6-816F-3879F97B5CBC}" type="slidenum">
-              <a:rPr lang="en-US"/>
-              <a:t>6</a:t>
-            </a:fld>
-            <a:endParaRPr lang="en-US"/>
-          </a:p>
-        </p:txBody>
-      </p:sp>
-    </p:spTree>
-    <p:extLst>
-      <p:ext uri="{BB962C8B-B14F-4D97-AF65-F5344CB8AC3E}">
-        <p14:creationId xmlns:p14="http://schemas.microsoft.com/office/powerpoint/2010/main" val="1024086991"/>
-      </p:ext>
-    </p:extLst>
-  </p:cSld>
-  <p:clrMapOvr>
-    <a:masterClrMapping/>
-  </p:clrMapOvr>
-</p:notes>
-</file>
-
-<file path=ppt/notesSlides/notesSlide7.xml><?xml version="1.0" encoding="utf-8"?>
-<p:notes xmlns:a="http://schemas.openxmlformats.org/drawingml/2006/main" xmlns:r="http://schemas.openxmlformats.org/officeDocument/2006/relationships" xmlns:p="http://schemas.openxmlformats.org/presentationml/2006/main">
-  <p:cSld>
-    <p:spTree>
-      <p:nvGrpSpPr>
-        <p:cNvPr id="1" name=""/>
-        <p:cNvGrpSpPr/>
-        <p:nvPr/>
-      </p:nvGrpSpPr>
-      <p:grpSpPr>
-        <a:xfrm>
-          <a:off x="0" y="0"/>
-          <a:ext cx="0" cy="0"/>
-          <a:chOff x="0" y="0"/>
-          <a:chExt cx="0" cy="0"/>
-        </a:xfrm>
-      </p:grpSpPr>
-      <p:sp>
-        <p:nvSpPr>
-          <p:cNvPr id="2" name="Slide Image Placeholder 1"/>
-          <p:cNvSpPr>
-            <a:spLocks noGrp="1" noRot="1" noChangeAspect="1"/>
-          </p:cNvSpPr>
-          <p:nvPr>
-            <p:ph type="sldImg"/>
-          </p:nvPr>
-        </p:nvSpPr>
-        <p:spPr/>
-      </p:sp>
-      <p:sp>
-        <p:nvSpPr>
-          <p:cNvPr id="3" name="Notes Placeholder 2"/>
-          <p:cNvSpPr>
-            <a:spLocks noGrp="1"/>
-          </p:cNvSpPr>
-          <p:nvPr>
-            <p:ph type="body" idx="1"/>
-          </p:nvPr>
-        </p:nvSpPr>
-        <p:spPr/>
-        <p:txBody>
-          <a:bodyPr/>
-          <a:lstStyle/>
-          <a:p>
-            <a:r>
-              <a:rPr lang="en-US" dirty="0"/>
-              <a:t/>
-            </a:r>
-            <a:endParaRPr lang="en-US" dirty="0"/>
-          </a:p>
-        </p:txBody>
-      </p:sp>
-      <p:sp>
-        <p:nvSpPr>
-          <p:cNvPr id="4" name="Slide Number Placeholder 3"/>
-          <p:cNvSpPr>
-            <a:spLocks noGrp="1"/>
-          </p:cNvSpPr>
-          <p:nvPr>
-            <p:ph type="sldNum" sz="quarter" idx="10"/>
-          </p:nvPr>
-        </p:nvSpPr>
-        <p:spPr/>
-        <p:txBody>
-          <a:bodyPr/>
-          <a:lstStyle/>
-          <a:p>
-            <a:fld id="{F7021451-1387-4CA6-816F-3879F97B5CBC}" type="slidenum">
-              <a:rPr lang="en-US"/>
-              <a:t>7</a:t>
-            </a:fld>
-            <a:endParaRPr lang="en-US"/>
-          </a:p>
-        </p:txBody>
-      </p:sp>
-    </p:spTree>
-    <p:extLst>
-      <p:ext uri="{BB962C8B-B14F-4D97-AF65-F5344CB8AC3E}">
-        <p14:creationId xmlns:p14="http://schemas.microsoft.com/office/powerpoint/2010/main" val="1024086991"/>
-      </p:ext>
-    </p:extLst>
-  </p:cSld>
-  <p:clrMapOvr>
-    <a:masterClrMapping/>
-  </p:clrMapOvr>
-</p:notes>
-</file>
-
-<file path=ppt/notesSlides/notesSlide8.xml><?xml version="1.0" encoding="utf-8"?>
-<p:notes xmlns:a="http://schemas.openxmlformats.org/drawingml/2006/main" xmlns:r="http://schemas.openxmlformats.org/officeDocument/2006/relationships" xmlns:p="http://schemas.openxmlformats.org/presentationml/2006/main">
-  <p:cSld>
-    <p:spTree>
-      <p:nvGrpSpPr>
-        <p:cNvPr id="1" name=""/>
-        <p:cNvGrpSpPr/>
-        <p:nvPr/>
-      </p:nvGrpSpPr>
-      <p:grpSpPr>
-        <a:xfrm>
-          <a:off x="0" y="0"/>
-          <a:ext cx="0" cy="0"/>
-          <a:chOff x="0" y="0"/>
-          <a:chExt cx="0" cy="0"/>
-        </a:xfrm>
-      </p:grpSpPr>
-      <p:sp>
-        <p:nvSpPr>
-          <p:cNvPr id="2" name="Slide Image Placeholder 1"/>
-          <p:cNvSpPr>
-            <a:spLocks noGrp="1" noRot="1" noChangeAspect="1"/>
-          </p:cNvSpPr>
-          <p:nvPr>
-            <p:ph type="sldImg"/>
-          </p:nvPr>
-        </p:nvSpPr>
-        <p:spPr/>
-      </p:sp>
-      <p:sp>
-        <p:nvSpPr>
-          <p:cNvPr id="3" name="Notes Placeholder 2"/>
-          <p:cNvSpPr>
-            <a:spLocks noGrp="1"/>
-          </p:cNvSpPr>
-          <p:nvPr>
-            <p:ph type="body" idx="1"/>
-          </p:nvPr>
-        </p:nvSpPr>
-        <p:spPr/>
-        <p:txBody>
-          <a:bodyPr/>
-          <a:lstStyle/>
-          <a:p>
-            <a:r>
-              <a:rPr lang="en-US" dirty="0"/>
-              <a:t/>
-            </a:r>
-            <a:endParaRPr lang="en-US" dirty="0"/>
-          </a:p>
-        </p:txBody>
-      </p:sp>
-      <p:sp>
-        <p:nvSpPr>
-          <p:cNvPr id="4" name="Slide Number Placeholder 3"/>
-          <p:cNvSpPr>
-            <a:spLocks noGrp="1"/>
-          </p:cNvSpPr>
-          <p:nvPr>
-            <p:ph type="sldNum" sz="quarter" idx="10"/>
-          </p:nvPr>
-        </p:nvSpPr>
-        <p:spPr/>
-        <p:txBody>
-          <a:bodyPr/>
-          <a:lstStyle/>
-          <a:p>
-            <a:fld id="{F7021451-1387-4CA6-816F-3879F97B5CBC}" type="slidenum">
-              <a:rPr lang="en-US"/>
-              <a:t>8</a:t>
-            </a:fld>
-            <a:endParaRPr lang="en-US"/>
-          </a:p>
-        </p:txBody>
-      </p:sp>
-    </p:spTree>
-    <p:extLst>
-      <p:ext uri="{BB962C8B-B14F-4D97-AF65-F5344CB8AC3E}">
-        <p14:creationId xmlns:p14="http://schemas.microsoft.com/office/powerpoint/2010/main" val="1024086991"/>
-      </p:ext>
-    </p:extLst>
-  </p:cSld>
-  <p:clrMapOvr>
-    <a:masterClrMapping/>
-  </p:clrMapOvr>
-</p:notes>
-</file>
-
 <file path=ppt/slideLayouts/slideLayout1.xml><?xml version="1.0" encoding="utf-8"?>
 <p:sldLayout xmlns:a="http://schemas.openxmlformats.org/drawingml/2006/main" xmlns:r="http://schemas.openxmlformats.org/officeDocument/2006/relationships" xmlns:p="http://schemas.openxmlformats.org/presentationml/2006/main" preserve="1">
   <p:cSld name="DEFAULT">
@@ -3262,705 +2902,6 @@
                   <a:schemeClr val="tx2"/>
                 </a:solidFill>
               </a:rPr>
-              <a:t>1장 설명 · 핵심 요약</a:t>
-            </a:r>
-            <a:endParaRPr lang="en-US" sz="2400" dirty="0"/>
-          </a:p>
-        </p:txBody>
-      </p:sp>
-      <p:sp>
-        <p:nvSpPr>
-          <p:cNvPr id="3" name="설명 배지 1"/>
-          <p:cNvSpPr/>
-          <p:nvPr/>
-        </p:nvSpPr>
-        <p:spPr>
-          <a:xfrm>
-            <a:off x="457200" y="384048"/>
-            <a:ext cx="420624" cy="329184"/>
-          </a:xfrm>
-          <a:prstGeom prst="roundRect">
-            <a:avLst>
-              <a:gd name="adj" fmla="val 22222"/>
-            </a:avLst>
-          </a:prstGeom>
-          <a:solidFill>
-            <a:schemeClr val="accent1"/>
-          </a:solidFill>
-          <a:ln w="12700">
-            <a:solidFill>
-              <a:schemeClr val="accent1"/>
-            </a:solidFill>
-            <a:prstDash val="solid"/>
-          </a:ln>
-        </p:spPr>
-      </p:sp>
-      <p:sp>
-        <p:nvSpPr>
-          <p:cNvPr id="4" name="설명 배지 글자 1"/>
-          <p:cNvSpPr txBox="1"/>
-          <p:nvPr/>
-        </p:nvSpPr>
-        <p:spPr>
-          <a:xfrm>
-            <a:off x="457200" y="384048"/>
-            <a:ext cx="420624" cy="329184"/>
-          </a:xfrm>
-          <a:prstGeom prst="rect">
-            <a:avLst/>
-          </a:prstGeom>
-          <a:noFill/>
-          <a:ln/>
-        </p:spPr>
-        <p:txBody>
-          <a:bodyPr wrap="square" lIns="0" tIns="0" rIns="0" bIns="0" rtlCol="0" anchor="ctr"/>
-          <a:lstStyle/>
-          <a:p>
-            <a:pPr algn="ctr" indent="0" marL="0">
-              <a:buNone/>
-            </a:pPr>
-            <a:r>
-              <a:rPr lang="en-US" sz="1000" b="1" dirty="0">
-                <a:solidFill>
-                  <a:schemeClr val="bg1"/>
-                </a:solidFill>
-              </a:rPr>
-              <a:t>설명</a:t>
-            </a:r>
-            <a:endParaRPr lang="en-US" sz="1000" dirty="0"/>
-          </a:p>
-        </p:txBody>
-      </p:sp>
-      <p:sp>
-        <p:nvSpPr>
-          <p:cNvPr id="5" name="설명 카드 1-1"/>
-          <p:cNvSpPr/>
-          <p:nvPr/>
-        </p:nvSpPr>
-        <p:spPr>
-          <a:xfrm>
-            <a:off x="457200" y="960120"/>
-            <a:ext cx="4023360" cy="1691640"/>
-          </a:xfrm>
-          <a:prstGeom prst="roundRect">
-            <a:avLst>
-              <a:gd name="adj" fmla="val 3243"/>
-            </a:avLst>
-          </a:prstGeom>
-          <a:solidFill>
-            <a:srgbClr val="FFFFFF"/>
-          </a:solidFill>
-          <a:ln w="9525">
-            <a:solidFill>
-              <a:srgbClr val="DCE5DF"/>
-            </a:solidFill>
-            <a:prstDash val="solid"/>
-          </a:ln>
-        </p:spPr>
-      </p:sp>
-      <p:sp>
-        <p:nvSpPr>
-          <p:cNvPr id="6" name="설명 제목 1-1"/>
-          <p:cNvSpPr txBox="1"/>
-          <p:nvPr/>
-        </p:nvSpPr>
-        <p:spPr>
-          <a:xfrm>
-            <a:off x="621792" y="1051560"/>
-            <a:ext cx="3657600" cy="274320"/>
-          </a:xfrm>
-          <a:prstGeom prst="rect">
-            <a:avLst/>
-          </a:prstGeom>
-          <a:noFill/>
-          <a:ln/>
-        </p:spPr>
-        <p:txBody>
-          <a:bodyPr wrap="square" lIns="0" tIns="0" rIns="0" bIns="0" rtlCol="0" anchor="ctr"/>
-          <a:lstStyle/>
-          <a:p>
-            <a:pPr indent="0" marL="0">
-              <a:buNone/>
-            </a:pPr>
-            <a:r>
-              <a:rPr lang="en-US" sz="1150" b="1" dirty="0">
-                <a:solidFill>
-                  <a:schemeClr val="tx2"/>
-                </a:solidFill>
-              </a:rPr>
-              <a:t>이 장이 보여 주는 것</a:t>
-            </a:r>
-            <a:endParaRPr lang="en-US" sz="1150" dirty="0"/>
-          </a:p>
-        </p:txBody>
-      </p:sp>
-      <p:sp>
-        <p:nvSpPr>
-          <p:cNvPr id="7" name="설명 내용 1-1"/>
-          <p:cNvSpPr txBox="1"/>
-          <p:nvPr/>
-        </p:nvSpPr>
-        <p:spPr>
-          <a:xfrm>
-            <a:off x="621792" y="1344168"/>
-            <a:ext cx="3703320" cy="1234440"/>
-          </a:xfrm>
-          <a:prstGeom prst="rect">
-            <a:avLst/>
-          </a:prstGeom>
-          <a:noFill/>
-          <a:ln/>
-        </p:spPr>
-        <p:txBody>
-          <a:bodyPr wrap="square" lIns="0" tIns="0" rIns="0" bIns="0" rtlCol="0" anchor="t">
-            <a:normAutofit/>
-          </a:bodyPr>
-          <a:lstStyle/>
-          <a:p>
-            <a:pPr marL="342900" indent="-342900">
-              <a:spcAft>
-                <a:spcPts val="300"/>
-              </a:spcAft>
-              <a:buSzPct val="100000"/>
-              <a:buChar char="•"/>
-            </a:pPr>
-            <a:r>
-              <a:rPr lang="en-US" sz="1050" dirty="0">
-                <a:solidFill>
-                  <a:schemeClr val="tx1"/>
-                </a:solidFill>
-              </a:rPr>
-              <a:t>통계로 받친 주장 한 문장 + 통계 활동에 조언을 얻은 책 한 권</a:t>
-            </a:r>
-            <a:endParaRPr lang="en-US" sz="1050" dirty="0"/>
-          </a:p>
-          <a:p>
-            <a:pPr marL="342900" indent="-342900">
-              <a:spcAft>
-                <a:spcPts val="300"/>
-              </a:spcAft>
-              <a:buSzPct val="100000"/>
-              <a:buChar char="•"/>
-            </a:pPr>
-            <a:r>
-              <a:rPr lang="en-US" sz="1050" dirty="0">
-                <a:solidFill>
-                  <a:schemeClr val="tx1"/>
-                </a:solidFill>
-              </a:rPr>
-              <a:t>'수가 는다'와 '비율이 는다'를 함께 말하는 주장</a:t>
-            </a:r>
-            <a:endParaRPr lang="en-US" sz="1050" dirty="0"/>
-          </a:p>
-          <a:p>
-            <a:pPr marL="342900" indent="-342900">
-              <a:spcAft>
-                <a:spcPts val="300"/>
-              </a:spcAft>
-              <a:buSzPct val="100000"/>
-              <a:buChar char="•"/>
-            </a:pPr>
-            <a:r>
-              <a:rPr lang="en-US" sz="1050" dirty="0">
-                <a:solidFill>
-                  <a:schemeClr val="tx1"/>
-                </a:solidFill>
-              </a:rPr>
-              <a:t>진로(초등교사)와 자료(교육통계) 연결</a:t>
-            </a:r>
-            <a:endParaRPr lang="en-US" sz="1050" dirty="0"/>
-          </a:p>
-        </p:txBody>
-      </p:sp>
-      <p:sp>
-        <p:nvSpPr>
-          <p:cNvPr id="8" name="설명 카드 1-2"/>
-          <p:cNvSpPr/>
-          <p:nvPr/>
-        </p:nvSpPr>
-        <p:spPr>
-          <a:xfrm>
-            <a:off x="4663440" y="960120"/>
-            <a:ext cx="4023360" cy="1691640"/>
-          </a:xfrm>
-          <a:prstGeom prst="roundRect">
-            <a:avLst>
-              <a:gd name="adj" fmla="val 3243"/>
-            </a:avLst>
-          </a:prstGeom>
-          <a:solidFill>
-            <a:srgbClr val="FFFFFF"/>
-          </a:solidFill>
-          <a:ln w="9525">
-            <a:solidFill>
-              <a:srgbClr val="DCE5DF"/>
-            </a:solidFill>
-            <a:prstDash val="solid"/>
-          </a:ln>
-        </p:spPr>
-      </p:sp>
-      <p:sp>
-        <p:nvSpPr>
-          <p:cNvPr id="9" name="설명 제목 1-2"/>
-          <p:cNvSpPr txBox="1"/>
-          <p:nvPr/>
-        </p:nvSpPr>
-        <p:spPr>
-          <a:xfrm>
-            <a:off x="4828032" y="1051560"/>
-            <a:ext cx="3657600" cy="274320"/>
-          </a:xfrm>
-          <a:prstGeom prst="rect">
-            <a:avLst/>
-          </a:prstGeom>
-          <a:noFill/>
-          <a:ln/>
-        </p:spPr>
-        <p:txBody>
-          <a:bodyPr wrap="square" lIns="0" tIns="0" rIns="0" bIns="0" rtlCol="0" anchor="ctr"/>
-          <a:lstStyle/>
-          <a:p>
-            <a:pPr indent="0" marL="0">
-              <a:buNone/>
-            </a:pPr>
-            <a:r>
-              <a:rPr lang="en-US" sz="1150" b="1" dirty="0">
-                <a:solidFill>
-                  <a:schemeClr val="tx2"/>
-                </a:solidFill>
-              </a:rPr>
-              <a:t>책에서 얻은 조언 (통계 활동용)</a:t>
-            </a:r>
-            <a:endParaRPr lang="en-US" sz="1150" dirty="0"/>
-          </a:p>
-        </p:txBody>
-      </p:sp>
-      <p:sp>
-        <p:nvSpPr>
-          <p:cNvPr id="10" name="설명 내용 1-2"/>
-          <p:cNvSpPr txBox="1"/>
-          <p:nvPr/>
-        </p:nvSpPr>
-        <p:spPr>
-          <a:xfrm>
-            <a:off x="4828032" y="1344168"/>
-            <a:ext cx="3703320" cy="1234440"/>
-          </a:xfrm>
-          <a:prstGeom prst="rect">
-            <a:avLst/>
-          </a:prstGeom>
-          <a:noFill/>
-          <a:ln/>
-        </p:spPr>
-        <p:txBody>
-          <a:bodyPr wrap="square" lIns="0" tIns="0" rIns="0" bIns="0" rtlCol="0" anchor="t">
-            <a:normAutofit/>
-          </a:bodyPr>
-          <a:lstStyle/>
-          <a:p>
-            <a:pPr marL="342900" indent="-342900">
-              <a:spcAft>
-                <a:spcPts val="300"/>
-              </a:spcAft>
-              <a:buSzPct val="100000"/>
-              <a:buChar char="•"/>
-            </a:pPr>
-            <a:r>
-              <a:rPr lang="en-US" sz="1050" dirty="0">
-                <a:solidFill>
-                  <a:schemeClr val="tx1"/>
-                </a:solidFill>
-              </a:rPr>
-              <a:t>조언: 숫자보다 '무엇에 대한 비율인지'(분모)를 보라 → 분자·분모·비율을 모두 표에 넣음(2장)</a:t>
-            </a:r>
-            <a:endParaRPr lang="en-US" sz="1050" dirty="0"/>
-          </a:p>
-          <a:p>
-            <a:pPr marL="342900" indent="-342900">
-              <a:spcAft>
-                <a:spcPts val="300"/>
-              </a:spcAft>
-              <a:buSzPct val="100000"/>
-              <a:buChar char="•"/>
-            </a:pPr>
-            <a:r>
-              <a:rPr lang="en-US" sz="1050" dirty="0">
-                <a:solidFill>
-                  <a:schemeClr val="tx1"/>
-                </a:solidFill>
-              </a:rPr>
-              <a:t>비율을 직접 계산해 원자료와 맞는지 확인(2장)</a:t>
-            </a:r>
-            <a:endParaRPr lang="en-US" sz="1050" dirty="0"/>
-          </a:p>
-          <a:p>
-            <a:pPr marL="342900" indent="-342900">
-              <a:spcAft>
-                <a:spcPts val="300"/>
-              </a:spcAft>
-              <a:buSzPct val="100000"/>
-              <a:buChar char="•"/>
-            </a:pPr>
-            <a:r>
-              <a:rPr lang="en-US" sz="1050" dirty="0">
-                <a:solidFill>
-                  <a:schemeClr val="tx1"/>
-                </a:solidFill>
-              </a:rPr>
-              <a:t>주장은 책이 아니라 교육기본통계에서 나왔다</a:t>
-            </a:r>
-            <a:endParaRPr lang="en-US" sz="1050" dirty="0"/>
-          </a:p>
-        </p:txBody>
-      </p:sp>
-      <p:sp>
-        <p:nvSpPr>
-          <p:cNvPr id="11" name="설명 카드 1-3"/>
-          <p:cNvSpPr/>
-          <p:nvPr/>
-        </p:nvSpPr>
-        <p:spPr>
-          <a:xfrm>
-            <a:off x="457200" y="2788920"/>
-            <a:ext cx="4023360" cy="1691640"/>
-          </a:xfrm>
-          <a:prstGeom prst="roundRect">
-            <a:avLst>
-              <a:gd name="adj" fmla="val 3243"/>
-            </a:avLst>
-          </a:prstGeom>
-          <a:solidFill>
-            <a:srgbClr val="FFFFFF"/>
-          </a:solidFill>
-          <a:ln w="9525">
-            <a:solidFill>
-              <a:srgbClr val="DCE5DF"/>
-            </a:solidFill>
-            <a:prstDash val="solid"/>
-          </a:ln>
-        </p:spPr>
-      </p:sp>
-      <p:sp>
-        <p:nvSpPr>
-          <p:cNvPr id="12" name="설명 제목 1-3"/>
-          <p:cNvSpPr txBox="1"/>
-          <p:nvPr/>
-        </p:nvSpPr>
-        <p:spPr>
-          <a:xfrm>
-            <a:off x="621792" y="2880360"/>
-            <a:ext cx="3657600" cy="274320"/>
-          </a:xfrm>
-          <a:prstGeom prst="rect">
-            <a:avLst/>
-          </a:prstGeom>
-          <a:noFill/>
-          <a:ln/>
-        </p:spPr>
-        <p:txBody>
-          <a:bodyPr wrap="square" lIns="0" tIns="0" rIns="0" bIns="0" rtlCol="0" anchor="ctr"/>
-          <a:lstStyle/>
-          <a:p>
-            <a:pPr indent="0" marL="0">
-              <a:buNone/>
-            </a:pPr>
-            <a:r>
-              <a:rPr lang="en-US" sz="1150" b="1" dirty="0">
-                <a:solidFill>
-                  <a:schemeClr val="tx2"/>
-                </a:solidFill>
-              </a:rPr>
-              <a:t>실제로 읽을 분량</a:t>
-            </a:r>
-            <a:endParaRPr lang="en-US" sz="1150" dirty="0"/>
-          </a:p>
-        </p:txBody>
-      </p:sp>
-      <p:sp>
-        <p:nvSpPr>
-          <p:cNvPr id="13" name="설명 내용 1-3"/>
-          <p:cNvSpPr txBox="1"/>
-          <p:nvPr/>
-        </p:nvSpPr>
-        <p:spPr>
-          <a:xfrm>
-            <a:off x="621792" y="3172968"/>
-            <a:ext cx="3703320" cy="1234440"/>
-          </a:xfrm>
-          <a:prstGeom prst="rect">
-            <a:avLst/>
-          </a:prstGeom>
-          <a:noFill/>
-          <a:ln/>
-        </p:spPr>
-        <p:txBody>
-          <a:bodyPr wrap="square" lIns="0" tIns="0" rIns="0" bIns="0" rtlCol="0" anchor="t">
-            <a:normAutofit/>
-          </a:bodyPr>
-          <a:lstStyle/>
-          <a:p>
-            <a:pPr marL="342900" indent="-342900">
-              <a:spcAft>
-                <a:spcPts val="300"/>
-              </a:spcAft>
-              <a:buSzPct val="100000"/>
-              <a:buChar char="•"/>
-            </a:pPr>
-            <a:r>
-              <a:rPr lang="en-US" sz="1050" dirty="0">
-                <a:solidFill>
-                  <a:schemeClr val="tx1"/>
-                </a:solidFill>
-              </a:rPr>
-              <a:t>비율과 백분율을 다룬 장</a:t>
-            </a:r>
-            <a:endParaRPr lang="en-US" sz="1050" dirty="0"/>
-          </a:p>
-          <a:p>
-            <a:pPr marL="342900" indent="-342900">
-              <a:spcAft>
-                <a:spcPts val="300"/>
-              </a:spcAft>
-              <a:buSzPct val="100000"/>
-              <a:buChar char="•"/>
-            </a:pPr>
-            <a:r>
-              <a:rPr lang="en-US" sz="1050" dirty="0">
-                <a:solidFill>
-                  <a:schemeClr val="tx1"/>
-                </a:solidFill>
-              </a:rPr>
-              <a:t>통계·데이터를 다룬 다른 책도 가능</a:t>
-            </a:r>
-            <a:endParaRPr lang="en-US" sz="1050" dirty="0"/>
-          </a:p>
-        </p:txBody>
-      </p:sp>
-      <p:sp>
-        <p:nvSpPr>
-          <p:cNvPr id="14" name="설명 카드 1-4"/>
-          <p:cNvSpPr/>
-          <p:nvPr/>
-        </p:nvSpPr>
-        <p:spPr>
-          <a:xfrm>
-            <a:off x="4663440" y="2788920"/>
-            <a:ext cx="4023360" cy="1691640"/>
-          </a:xfrm>
-          <a:prstGeom prst="roundRect">
-            <a:avLst>
-              <a:gd name="adj" fmla="val 3243"/>
-            </a:avLst>
-          </a:prstGeom>
-          <a:solidFill>
-            <a:srgbClr val="FFFFFF"/>
-          </a:solidFill>
-          <a:ln w="9525">
-            <a:solidFill>
-              <a:srgbClr val="DCE5DF"/>
-            </a:solidFill>
-            <a:prstDash val="solid"/>
-          </a:ln>
-        </p:spPr>
-      </p:sp>
-      <p:sp>
-        <p:nvSpPr>
-          <p:cNvPr id="15" name="설명 제목 1-4"/>
-          <p:cNvSpPr txBox="1"/>
-          <p:nvPr/>
-        </p:nvSpPr>
-        <p:spPr>
-          <a:xfrm>
-            <a:off x="4828032" y="2880360"/>
-            <a:ext cx="3657600" cy="274320"/>
-          </a:xfrm>
-          <a:prstGeom prst="rect">
-            <a:avLst/>
-          </a:prstGeom>
-          <a:noFill/>
-          <a:ln/>
-        </p:spPr>
-        <p:txBody>
-          <a:bodyPr wrap="square" lIns="0" tIns="0" rIns="0" bIns="0" rtlCol="0" anchor="ctr"/>
-          <a:lstStyle/>
-          <a:p>
-            <a:pPr indent="0" marL="0">
-              <a:buNone/>
-            </a:pPr>
-            <a:r>
-              <a:rPr lang="en-US" sz="1150" b="1" dirty="0">
-                <a:solidFill>
-                  <a:schemeClr val="tx2"/>
-                </a:solidFill>
-              </a:rPr>
-              <a:t>채점 연결</a:t>
-            </a:r>
-            <a:endParaRPr lang="en-US" sz="1150" dirty="0"/>
-          </a:p>
-        </p:txBody>
-      </p:sp>
-      <p:sp>
-        <p:nvSpPr>
-          <p:cNvPr id="16" name="설명 내용 1-4"/>
-          <p:cNvSpPr txBox="1"/>
-          <p:nvPr/>
-        </p:nvSpPr>
-        <p:spPr>
-          <a:xfrm>
-            <a:off x="4828032" y="3172968"/>
-            <a:ext cx="3703320" cy="1234440"/>
-          </a:xfrm>
-          <a:prstGeom prst="rect">
-            <a:avLst/>
-          </a:prstGeom>
-          <a:noFill/>
-          <a:ln/>
-        </p:spPr>
-        <p:txBody>
-          <a:bodyPr wrap="square" lIns="0" tIns="0" rIns="0" bIns="0" rtlCol="0" anchor="t">
-            <a:normAutofit/>
-          </a:bodyPr>
-          <a:lstStyle/>
-          <a:p>
-            <a:pPr marL="342900" indent="-342900">
-              <a:spcAft>
-                <a:spcPts val="300"/>
-              </a:spcAft>
-              <a:buSzPct val="100000"/>
-              <a:buChar char="•"/>
-            </a:pPr>
-            <a:r>
-              <a:rPr lang="en-US" sz="1050" dirty="0">
-                <a:solidFill>
-                  <a:schemeClr val="tx1"/>
-                </a:solidFill>
-              </a:rPr>
-              <a:t>1번 도서 20점: 도서명·저자 + 통계 활동에 얻은 조언</a:t>
-            </a:r>
-            <a:endParaRPr lang="en-US" sz="1050" dirty="0"/>
-          </a:p>
-          <a:p>
-            <a:pPr marL="342900" indent="-342900">
-              <a:spcAft>
-                <a:spcPts val="300"/>
-              </a:spcAft>
-              <a:buSzPct val="100000"/>
-              <a:buChar char="•"/>
-            </a:pPr>
-            <a:r>
-              <a:rPr lang="en-US" sz="1050" dirty="0">
-                <a:solidFill>
-                  <a:schemeClr val="tx1"/>
-                </a:solidFill>
-              </a:rPr>
-              <a:t>책의 조언(분모)이 2장의 표 구성과 3장의 해석에 쓰였다</a:t>
-            </a:r>
-            <a:endParaRPr lang="en-US" sz="1050" dirty="0"/>
-          </a:p>
-        </p:txBody>
-      </p:sp>
-      <p:sp>
-        <p:nvSpPr>
-          <p:cNvPr id="25" name="Slide Number Placeholder 0"/>
-          <p:cNvSpPr>
-            <a:spLocks noGrp="1"/>
-          </p:cNvSpPr>
-          <p:nvPr>
-            <p:ph type="sldNum" sz="quarter" idx="4294967295"/>
-          </p:nvPr>
-        </p:nvSpPr>
-        <p:spPr>
-          <a:xfrm>
-            <a:off x="8229600" y="4754880"/>
-            <a:ext cx="457200" cy="228600"/>
-          </a:xfrm>
-          <a:prstGeom prst="rect">
-            <a:avLst/>
-          </a:prstGeom>
-          <a:extLst>
-            <a:ext uri="{C572A759-6A51-4108-AA02-DFA0A04FC94B}">
-              <ma14:wrappingTextBoxFlag xmlns:ma14="http://schemas.microsoft.com/office/mac/drawingml/2011/main" val="0"/>
-            </a:ext>
-          </a:extLst>
-        </p:spPr>
-        <p:txBody>
-          <a:bodyPr/>
-          <a:lstStyle>
-            <a:lvl1pPr>
-              <a:defRPr sz="900">
-                <a:solidFill>
-                  <a:srgbClr val="6B6759"/>
-                </a:solidFill>
-              </a:defRPr>
-            </a:lvl1pPr>
-          </a:lstStyle>
-          <a:p>
-            <a:pPr algn="r"/>
-            <a:fld id="{F7021451-1387-4CA6-816F-3879F97B5CBC}" type="slidenum">
-              <a:rPr b="0" lang="en-US"/>
-              <a:t>2</a:t>
-            </a:fld>
-            <a:endParaRPr lang="en-US"/>
-          </a:p>
-        </p:txBody>
-      </p:sp>
-    </p:spTree>
-  </p:cSld>
-  <p:clrMapOvr>
-    <a:masterClrMapping/>
-  </p:clrMapOvr>
-</p:sld>
-</file>
-
-<file path=ppt/slides/slide3.xml><?xml version="1.0" encoding="utf-8"?>
-<p:sld xmlns:a="http://schemas.openxmlformats.org/drawingml/2006/main" xmlns:r="http://schemas.openxmlformats.org/officeDocument/2006/relationships" xmlns:p="http://schemas.openxmlformats.org/presentationml/2006/main">
-  <p:cSld name="Slide 3">
-    <p:spTree>
-      <p:nvGrpSpPr>
-        <p:cNvPr id="1" name=""/>
-        <p:cNvGrpSpPr/>
-        <p:nvPr/>
-      </p:nvGrpSpPr>
-      <p:grpSpPr>
-        <a:xfrm>
-          <a:off x="0" y="0"/>
-          <a:ext cx="0" cy="0"/>
-          <a:chOff x="0" y="0"/>
-          <a:chExt cx="0" cy="0"/>
-        </a:xfrm>
-      </p:grpSpPr>
-      <p:sp>
-        <p:nvSpPr>
-          <p:cNvPr id="2" name="Text 0"/>
-          <p:cNvSpPr/>
-          <p:nvPr>
-            <p:ph idx="100" type="title" hasCustomPrompt="1"/>
-          </p:nvPr>
-        </p:nvSpPr>
-        <p:spPr>
-          <a:xfrm>
-            <a:off x="960120" y="274320"/>
-            <a:ext cx="7726680" cy="548640"/>
-          </a:xfrm>
-          <a:prstGeom prst="rect">
-            <a:avLst/>
-          </a:prstGeom>
-          <a:noFill/>
-          <a:ln/>
-        </p:spPr>
-        <p:txBody>
-          <a:bodyPr wrap="square" lIns="0" tIns="0" rIns="0" bIns="0" rtlCol="0" anchor="ctr"/>
-          <a:lstStyle/>
-          <a:p>
-            <a:pPr algn="l" indent="0" marL="0">
-              <a:buNone/>
-            </a:pPr>
-            <a:r>
-              <a:rPr lang="en-US" sz="2400" b="1" dirty="0">
-                <a:solidFill>
-                  <a:schemeClr val="tx2"/>
-                </a:solidFill>
-              </a:rPr>
               <a:t>자료 출처와 내가 만든 표</a:t>
             </a:r>
             <a:endParaRPr lang="en-US" sz="2400" dirty="0"/>
@@ -4168,7 +3109,7 @@
       </p:sp>
       <p:graphicFrame>
         <p:nvGraphicFramePr>
-          <p:cNvPr id="4" name="원자료 표"/>
+          <p:cNvPr id="3" name="원자료 표"/>
           <p:cNvGraphicFramePr>
             <a:graphicFrameLocks noGrp="1"/>
           </p:cNvGraphicFramePr>
@@ -7130,7 +6071,7 @@
       </p:sp>
       <p:graphicFrame>
         <p:nvGraphicFramePr>
-          <p:cNvPr id="7" name="내가 만든 표"/>
+          <p:cNvPr id="5" name="내가 만든 표"/>
           <p:cNvGraphicFramePr>
             <a:graphicFrameLocks noGrp="1"/>
           </p:cNvGraphicFramePr>
@@ -8651,7 +7592,7 @@
             <a:pPr algn="r"/>
             <a:fld id="{F7021451-1387-4CA6-816F-3879F97B5CBC}" type="slidenum">
               <a:rPr b="0" lang="en-US"/>
-              <a:t>3</a:t>
+              <a:t>2</a:t>
             </a:fld>
             <a:endParaRPr lang="en-US"/>
           </a:p>
@@ -8665,726 +7606,9 @@
 </p:sld>
 </file>
 
-<file path=ppt/slides/slide4.xml><?xml version="1.0" encoding="utf-8"?>
+<file path=ppt/slides/slide3.xml><?xml version="1.0" encoding="utf-8"?>
 <p:sld xmlns:a="http://schemas.openxmlformats.org/drawingml/2006/main" xmlns:r="http://schemas.openxmlformats.org/officeDocument/2006/relationships" xmlns:p="http://schemas.openxmlformats.org/presentationml/2006/main">
-  <p:cSld name="Slide 4">
-    <p:spTree>
-      <p:nvGrpSpPr>
-        <p:cNvPr id="1" name=""/>
-        <p:cNvGrpSpPr/>
-        <p:nvPr/>
-      </p:nvGrpSpPr>
-      <p:grpSpPr>
-        <a:xfrm>
-          <a:off x="0" y="0"/>
-          <a:ext cx="0" cy="0"/>
-          <a:chOff x="0" y="0"/>
-          <a:chExt cx="0" cy="0"/>
-        </a:xfrm>
-      </p:grpSpPr>
-      <p:sp>
-        <p:nvSpPr>
-          <p:cNvPr id="2" name="Text 0"/>
-          <p:cNvSpPr/>
-          <p:nvPr>
-            <p:ph idx="100" type="title" hasCustomPrompt="1"/>
-          </p:nvPr>
-        </p:nvSpPr>
-        <p:spPr>
-          <a:xfrm>
-            <a:off x="960120" y="274320"/>
-            <a:ext cx="7726680" cy="548640"/>
-          </a:xfrm>
-          <a:prstGeom prst="rect">
-            <a:avLst/>
-          </a:prstGeom>
-          <a:noFill/>
-          <a:ln/>
-        </p:spPr>
-        <p:txBody>
-          <a:bodyPr wrap="square" lIns="0" tIns="0" rIns="0" bIns="0" rtlCol="0" anchor="ctr"/>
-          <a:lstStyle/>
-          <a:p>
-            <a:pPr algn="l" indent="0" marL="0">
-              <a:buNone/>
-            </a:pPr>
-            <a:r>
-              <a:rPr lang="en-US" sz="2400" b="1" dirty="0">
-                <a:solidFill>
-                  <a:schemeClr val="tx2"/>
-                </a:solidFill>
-              </a:rPr>
-              <a:t>2장 설명 · 핵심 요약</a:t>
-            </a:r>
-            <a:endParaRPr lang="en-US" sz="2400" dirty="0"/>
-          </a:p>
-        </p:txBody>
-      </p:sp>
-      <p:sp>
-        <p:nvSpPr>
-          <p:cNvPr id="3" name="설명 배지 2"/>
-          <p:cNvSpPr/>
-          <p:nvPr/>
-        </p:nvSpPr>
-        <p:spPr>
-          <a:xfrm>
-            <a:off x="457200" y="384048"/>
-            <a:ext cx="420624" cy="329184"/>
-          </a:xfrm>
-          <a:prstGeom prst="roundRect">
-            <a:avLst>
-              <a:gd name="adj" fmla="val 22222"/>
-            </a:avLst>
-          </a:prstGeom>
-          <a:solidFill>
-            <a:schemeClr val="accent1"/>
-          </a:solidFill>
-          <a:ln w="12700">
-            <a:solidFill>
-              <a:schemeClr val="accent1"/>
-            </a:solidFill>
-            <a:prstDash val="solid"/>
-          </a:ln>
-        </p:spPr>
-      </p:sp>
-      <p:sp>
-        <p:nvSpPr>
-          <p:cNvPr id="4" name="설명 배지 글자 2"/>
-          <p:cNvSpPr txBox="1"/>
-          <p:nvPr/>
-        </p:nvSpPr>
-        <p:spPr>
-          <a:xfrm>
-            <a:off x="457200" y="384048"/>
-            <a:ext cx="420624" cy="329184"/>
-          </a:xfrm>
-          <a:prstGeom prst="rect">
-            <a:avLst/>
-          </a:prstGeom>
-          <a:noFill/>
-          <a:ln/>
-        </p:spPr>
-        <p:txBody>
-          <a:bodyPr wrap="square" lIns="0" tIns="0" rIns="0" bIns="0" rtlCol="0" anchor="ctr"/>
-          <a:lstStyle/>
-          <a:p>
-            <a:pPr algn="ctr" indent="0" marL="0">
-              <a:buNone/>
-            </a:pPr>
-            <a:r>
-              <a:rPr lang="en-US" sz="1000" b="1" dirty="0">
-                <a:solidFill>
-                  <a:schemeClr val="bg1"/>
-                </a:solidFill>
-              </a:rPr>
-              <a:t>설명</a:t>
-            </a:r>
-            <a:endParaRPr lang="en-US" sz="1000" dirty="0"/>
-          </a:p>
-        </p:txBody>
-      </p:sp>
-      <p:sp>
-        <p:nvSpPr>
-          <p:cNvPr id="5" name="설명 카드 2-1"/>
-          <p:cNvSpPr/>
-          <p:nvPr/>
-        </p:nvSpPr>
-        <p:spPr>
-          <a:xfrm>
-            <a:off x="457200" y="960120"/>
-            <a:ext cx="4023360" cy="1691640"/>
-          </a:xfrm>
-          <a:prstGeom prst="roundRect">
-            <a:avLst>
-              <a:gd name="adj" fmla="val 3243"/>
-            </a:avLst>
-          </a:prstGeom>
-          <a:solidFill>
-            <a:srgbClr val="FFFFFF"/>
-          </a:solidFill>
-          <a:ln w="9525">
-            <a:solidFill>
-              <a:srgbClr val="DCE5DF"/>
-            </a:solidFill>
-            <a:prstDash val="solid"/>
-          </a:ln>
-        </p:spPr>
-      </p:sp>
-      <p:sp>
-        <p:nvSpPr>
-          <p:cNvPr id="6" name="설명 제목 2-1"/>
-          <p:cNvSpPr txBox="1"/>
-          <p:nvPr/>
-        </p:nvSpPr>
-        <p:spPr>
-          <a:xfrm>
-            <a:off x="621792" y="1051560"/>
-            <a:ext cx="3657600" cy="274320"/>
-          </a:xfrm>
-          <a:prstGeom prst="rect">
-            <a:avLst/>
-          </a:prstGeom>
-          <a:noFill/>
-          <a:ln/>
-        </p:spPr>
-        <p:txBody>
-          <a:bodyPr wrap="square" lIns="0" tIns="0" rIns="0" bIns="0" rtlCol="0" anchor="ctr"/>
-          <a:lstStyle/>
-          <a:p>
-            <a:pPr indent="0" marL="0">
-              <a:buNone/>
-            </a:pPr>
-            <a:r>
-              <a:rPr lang="en-US" sz="1150" b="1" dirty="0">
-                <a:solidFill>
-                  <a:schemeClr val="tx2"/>
-                </a:solidFill>
-              </a:rPr>
-              <a:t>실재하는 자료다</a:t>
-            </a:r>
-            <a:endParaRPr lang="en-US" sz="1150" dirty="0"/>
-          </a:p>
-        </p:txBody>
-      </p:sp>
-      <p:sp>
-        <p:nvSpPr>
-          <p:cNvPr id="7" name="설명 내용 2-1"/>
-          <p:cNvSpPr txBox="1"/>
-          <p:nvPr/>
-        </p:nvSpPr>
-        <p:spPr>
-          <a:xfrm>
-            <a:off x="621792" y="1344168"/>
-            <a:ext cx="3703320" cy="1234440"/>
-          </a:xfrm>
-          <a:prstGeom prst="rect">
-            <a:avLst/>
-          </a:prstGeom>
-          <a:noFill/>
-          <a:ln/>
-        </p:spPr>
-        <p:txBody>
-          <a:bodyPr wrap="square" lIns="0" tIns="0" rIns="0" bIns="0" rtlCol="0" anchor="t">
-            <a:normAutofit/>
-          </a:bodyPr>
-          <a:lstStyle/>
-          <a:p>
-            <a:pPr marL="342900" indent="-342900">
-              <a:spcAft>
-                <a:spcPts val="300"/>
-              </a:spcAft>
-              <a:buSzPct val="100000"/>
-              <a:buChar char="•"/>
-            </a:pPr>
-            <a:r>
-              <a:rPr lang="en-US" sz="1050" dirty="0">
-                <a:solidFill>
-                  <a:schemeClr val="tx1"/>
-                </a:solidFill>
-              </a:rPr>
-              <a:t>교육부·한국교육개발원이 매년 8월 발표하는 국가승인통계</a:t>
-            </a:r>
-            <a:endParaRPr lang="en-US" sz="1050" dirty="0"/>
-          </a:p>
-          <a:p>
-            <a:pPr marL="342900" indent="-342900">
-              <a:spcAft>
-                <a:spcPts val="300"/>
-              </a:spcAft>
-              <a:buSzPct val="100000"/>
-              <a:buChar char="•"/>
-            </a:pPr>
-            <a:r>
-              <a:rPr lang="en-US" sz="1050" dirty="0">
-                <a:solidFill>
-                  <a:schemeClr val="tx1"/>
-                </a:solidFill>
-              </a:rPr>
-              <a:t>학교급별·시도별·유형별(국제결혼·외국인 가정) 표가 있다</a:t>
-            </a:r>
-            <a:endParaRPr lang="en-US" sz="1050" dirty="0"/>
-          </a:p>
-        </p:txBody>
-      </p:sp>
-      <p:sp>
-        <p:nvSpPr>
-          <p:cNvPr id="8" name="설명 카드 2-2"/>
-          <p:cNvSpPr/>
-          <p:nvPr/>
-        </p:nvSpPr>
-        <p:spPr>
-          <a:xfrm>
-            <a:off x="4663440" y="960120"/>
-            <a:ext cx="4023360" cy="1691640"/>
-          </a:xfrm>
-          <a:prstGeom prst="roundRect">
-            <a:avLst>
-              <a:gd name="adj" fmla="val 3243"/>
-            </a:avLst>
-          </a:prstGeom>
-          <a:solidFill>
-            <a:srgbClr val="FFFFFF"/>
-          </a:solidFill>
-          <a:ln w="9525">
-            <a:solidFill>
-              <a:srgbClr val="DCE5DF"/>
-            </a:solidFill>
-            <a:prstDash val="solid"/>
-          </a:ln>
-        </p:spPr>
-      </p:sp>
-      <p:sp>
-        <p:nvSpPr>
-          <p:cNvPr id="9" name="설명 제목 2-2"/>
-          <p:cNvSpPr txBox="1"/>
-          <p:nvPr/>
-        </p:nvSpPr>
-        <p:spPr>
-          <a:xfrm>
-            <a:off x="4828032" y="1051560"/>
-            <a:ext cx="3657600" cy="274320"/>
-          </a:xfrm>
-          <a:prstGeom prst="rect">
-            <a:avLst/>
-          </a:prstGeom>
-          <a:noFill/>
-          <a:ln/>
-        </p:spPr>
-        <p:txBody>
-          <a:bodyPr wrap="square" lIns="0" tIns="0" rIns="0" bIns="0" rtlCol="0" anchor="ctr"/>
-          <a:lstStyle/>
-          <a:p>
-            <a:pPr indent="0" marL="0">
-              <a:buNone/>
-            </a:pPr>
-            <a:r>
-              <a:rPr lang="en-US" sz="1150" b="1" dirty="0">
-                <a:solidFill>
-                  <a:schemeClr val="tx2"/>
-                </a:solidFill>
-              </a:rPr>
-              <a:t>얻는 길 (링크)</a:t>
-            </a:r>
-            <a:endParaRPr lang="en-US" sz="1150" dirty="0"/>
-          </a:p>
-        </p:txBody>
-      </p:sp>
-      <p:sp>
-        <p:nvSpPr>
-          <p:cNvPr id="10" name="설명 내용 2-2"/>
-          <p:cNvSpPr txBox="1"/>
-          <p:nvPr/>
-        </p:nvSpPr>
-        <p:spPr>
-          <a:xfrm>
-            <a:off x="4828032" y="1344168"/>
-            <a:ext cx="3703320" cy="1234440"/>
-          </a:xfrm>
-          <a:prstGeom prst="rect">
-            <a:avLst/>
-          </a:prstGeom>
-          <a:noFill/>
-          <a:ln/>
-        </p:spPr>
-        <p:txBody>
-          <a:bodyPr wrap="square" lIns="0" tIns="0" rIns="0" bIns="0" rtlCol="0" anchor="t">
-            <a:normAutofit/>
-          </a:bodyPr>
-          <a:lstStyle/>
-          <a:p>
-            <a:pPr marL="342900" indent="-342900">
-              <a:spcAft>
-                <a:spcPts val="300"/>
-              </a:spcAft>
-              <a:buSzPct val="100000"/>
-              <a:buChar char="•"/>
-            </a:pPr>
-            <a:r>
-              <a:rPr lang="en-US" sz="1050" dirty="0">
-                <a:solidFill>
-                  <a:schemeClr val="tx1"/>
-                </a:solidFill>
-              </a:rPr>
-              <a:t>kess.kedi.re.kr → 교육통계연보 → 학생 수, 다문화 학생 수 (엑셀 내려받기)</a:t>
-            </a:r>
-            <a:endParaRPr lang="en-US" sz="1050" dirty="0"/>
-          </a:p>
-          <a:p>
-            <a:pPr marL="342900" indent="-342900">
-              <a:spcAft>
-                <a:spcPts val="300"/>
-              </a:spcAft>
-              <a:buSzPct val="100000"/>
-              <a:buChar char="•"/>
-            </a:pPr>
-            <a:r>
-              <a:rPr lang="en-US" sz="1050" dirty="0">
-                <a:solidFill>
-                  <a:schemeClr val="tx1"/>
-                </a:solidFill>
-              </a:rPr>
-              <a:t>moe.go.kr → 보도자료 '교육기본통계 결과'(8월)에 요약 표</a:t>
-            </a:r>
-            <a:endParaRPr lang="en-US" sz="1050" dirty="0"/>
-          </a:p>
-          <a:p>
-            <a:pPr marL="342900" indent="-342900">
-              <a:spcAft>
-                <a:spcPts val="300"/>
-              </a:spcAft>
-              <a:buSzPct val="100000"/>
-              <a:buChar char="•"/>
-            </a:pPr>
-            <a:r>
-              <a:rPr lang="en-US" sz="1050" dirty="0">
-                <a:solidFill>
-                  <a:schemeClr val="tx1"/>
-                </a:solidFill>
-              </a:rPr>
-              <a:t>시도별 수치도 같은 표에 있다(광주도 찾을 수 있다)</a:t>
-            </a:r>
-            <a:endParaRPr lang="en-US" sz="1050" dirty="0"/>
-          </a:p>
-        </p:txBody>
-      </p:sp>
-      <p:sp>
-        <p:nvSpPr>
-          <p:cNvPr id="11" name="설명 카드 2-3"/>
-          <p:cNvSpPr/>
-          <p:nvPr/>
-        </p:nvSpPr>
-        <p:spPr>
-          <a:xfrm>
-            <a:off x="457200" y="2788920"/>
-            <a:ext cx="4023360" cy="1691640"/>
-          </a:xfrm>
-          <a:prstGeom prst="roundRect">
-            <a:avLst>
-              <a:gd name="adj" fmla="val 3243"/>
-            </a:avLst>
-          </a:prstGeom>
-          <a:solidFill>
-            <a:srgbClr val="FFFFFF"/>
-          </a:solidFill>
-          <a:ln w="9525">
-            <a:solidFill>
-              <a:srgbClr val="DCE5DF"/>
-            </a:solidFill>
-            <a:prstDash val="solid"/>
-          </a:ln>
-        </p:spPr>
-      </p:sp>
-      <p:sp>
-        <p:nvSpPr>
-          <p:cNvPr id="12" name="설명 제목 2-3"/>
-          <p:cNvSpPr txBox="1"/>
-          <p:nvPr/>
-        </p:nvSpPr>
-        <p:spPr>
-          <a:xfrm>
-            <a:off x="621792" y="2880360"/>
-            <a:ext cx="3657600" cy="274320"/>
-          </a:xfrm>
-          <a:prstGeom prst="rect">
-            <a:avLst/>
-          </a:prstGeom>
-          <a:noFill/>
-          <a:ln/>
-        </p:spPr>
-        <p:txBody>
-          <a:bodyPr wrap="square" lIns="0" tIns="0" rIns="0" bIns="0" rtlCol="0" anchor="ctr"/>
-          <a:lstStyle/>
-          <a:p>
-            <a:pPr indent="0" marL="0">
-              <a:buNone/>
-            </a:pPr>
-            <a:r>
-              <a:rPr lang="en-US" sz="1150" b="1" dirty="0">
-                <a:solidFill>
-                  <a:schemeClr val="tx2"/>
-                </a:solidFill>
-              </a:rPr>
-              <a:t>원자료 → 가공</a:t>
-            </a:r>
-            <a:endParaRPr lang="en-US" sz="1150" dirty="0"/>
-          </a:p>
-        </p:txBody>
-      </p:sp>
-      <p:sp>
-        <p:nvSpPr>
-          <p:cNvPr id="13" name="설명 내용 2-3"/>
-          <p:cNvSpPr txBox="1"/>
-          <p:nvPr/>
-        </p:nvSpPr>
-        <p:spPr>
-          <a:xfrm>
-            <a:off x="621792" y="3172968"/>
-            <a:ext cx="3703320" cy="1234440"/>
-          </a:xfrm>
-          <a:prstGeom prst="rect">
-            <a:avLst/>
-          </a:prstGeom>
-          <a:noFill/>
-          <a:ln/>
-        </p:spPr>
-        <p:txBody>
-          <a:bodyPr wrap="square" lIns="0" tIns="0" rIns="0" bIns="0" rtlCol="0" anchor="t">
-            <a:normAutofit/>
-          </a:bodyPr>
-          <a:lstStyle/>
-          <a:p>
-            <a:pPr marL="342900" indent="-342900">
-              <a:spcAft>
-                <a:spcPts val="300"/>
-              </a:spcAft>
-              <a:buSzPct val="100000"/>
-              <a:buChar char="•"/>
-            </a:pPr>
-            <a:r>
-              <a:rPr lang="en-US" sz="1050" dirty="0">
-                <a:solidFill>
-                  <a:schemeClr val="tx1"/>
-                </a:solidFill>
-              </a:rPr>
-              <a:t>전체는 초·중·고 합계만(유치원 제외), 다문화는 합계 행만</a:t>
-            </a:r>
-            <a:endParaRPr lang="en-US" sz="1050" dirty="0"/>
-          </a:p>
-          <a:p>
-            <a:pPr marL="342900" indent="-342900">
-              <a:spcAft>
-                <a:spcPts val="300"/>
-              </a:spcAft>
-              <a:buSzPct val="100000"/>
-              <a:buChar char="•"/>
-            </a:pPr>
-            <a:r>
-              <a:rPr lang="en-US" sz="1050" dirty="0">
-                <a:solidFill>
-                  <a:schemeClr val="tx1"/>
-                </a:solidFill>
-              </a:rPr>
-              <a:t>비율 = 다문화 ÷ 전체 × 100 → 원자료의 비율(4.0%)과 같은지 확인</a:t>
-            </a:r>
-            <a:endParaRPr lang="en-US" sz="1050" dirty="0"/>
-          </a:p>
-          <a:p>
-            <a:pPr marL="342900" indent="-342900">
-              <a:spcAft>
-                <a:spcPts val="300"/>
-              </a:spcAft>
-              <a:buSzPct val="100000"/>
-              <a:buChar char="•"/>
-            </a:pPr>
-            <a:r>
-              <a:rPr lang="en-US" sz="1050" dirty="0">
-                <a:solidFill>
-                  <a:schemeClr val="tx1"/>
-                </a:solidFill>
-              </a:rPr>
-              <a:t>2025년 전체 501.5만은 초 234.5 + 중 137.0 + 고 129.9</a:t>
-            </a:r>
-            <a:endParaRPr lang="en-US" sz="1050" dirty="0"/>
-          </a:p>
-        </p:txBody>
-      </p:sp>
-      <p:sp>
-        <p:nvSpPr>
-          <p:cNvPr id="14" name="설명 카드 2-4"/>
-          <p:cNvSpPr/>
-          <p:nvPr/>
-        </p:nvSpPr>
-        <p:spPr>
-          <a:xfrm>
-            <a:off x="4663440" y="2788920"/>
-            <a:ext cx="4023360" cy="1691640"/>
-          </a:xfrm>
-          <a:prstGeom prst="roundRect">
-            <a:avLst>
-              <a:gd name="adj" fmla="val 3243"/>
-            </a:avLst>
-          </a:prstGeom>
-          <a:solidFill>
-            <a:srgbClr val="FFFFFF"/>
-          </a:solidFill>
-          <a:ln w="9525">
-            <a:solidFill>
-              <a:srgbClr val="DCE5DF"/>
-            </a:solidFill>
-            <a:prstDash val="solid"/>
-          </a:ln>
-        </p:spPr>
-      </p:sp>
-      <p:sp>
-        <p:nvSpPr>
-          <p:cNvPr id="15" name="설명 제목 2-4"/>
-          <p:cNvSpPr txBox="1"/>
-          <p:nvPr/>
-        </p:nvSpPr>
-        <p:spPr>
-          <a:xfrm>
-            <a:off x="4828032" y="2880360"/>
-            <a:ext cx="3657600" cy="274320"/>
-          </a:xfrm>
-          <a:prstGeom prst="rect">
-            <a:avLst/>
-          </a:prstGeom>
-          <a:noFill/>
-          <a:ln/>
-        </p:spPr>
-        <p:txBody>
-          <a:bodyPr wrap="square" lIns="0" tIns="0" rIns="0" bIns="0" rtlCol="0" anchor="ctr"/>
-          <a:lstStyle/>
-          <a:p>
-            <a:pPr indent="0" marL="0">
-              <a:buNone/>
-            </a:pPr>
-            <a:r>
-              <a:rPr lang="en-US" sz="1150" b="1" dirty="0">
-                <a:solidFill>
-                  <a:schemeClr val="tx2"/>
-                </a:solidFill>
-              </a:rPr>
-              <a:t>채점 연결</a:t>
-            </a:r>
-            <a:endParaRPr lang="en-US" sz="1150" dirty="0"/>
-          </a:p>
-        </p:txBody>
-      </p:sp>
-      <p:sp>
-        <p:nvSpPr>
-          <p:cNvPr id="16" name="설명 내용 2-4"/>
-          <p:cNvSpPr txBox="1"/>
-          <p:nvPr/>
-        </p:nvSpPr>
-        <p:spPr>
-          <a:xfrm>
-            <a:off x="4828032" y="3172968"/>
-            <a:ext cx="3703320" cy="1234440"/>
-          </a:xfrm>
-          <a:prstGeom prst="rect">
-            <a:avLst/>
-          </a:prstGeom>
-          <a:noFill/>
-          <a:ln/>
-        </p:spPr>
-        <p:txBody>
-          <a:bodyPr wrap="square" lIns="0" tIns="0" rIns="0" bIns="0" rtlCol="0" anchor="t">
-            <a:normAutofit/>
-          </a:bodyPr>
-          <a:lstStyle/>
-          <a:p>
-            <a:pPr marL="342900" indent="-342900">
-              <a:spcAft>
-                <a:spcPts val="300"/>
-              </a:spcAft>
-              <a:buSzPct val="100000"/>
-              <a:buChar char="•"/>
-            </a:pPr>
-            <a:r>
-              <a:rPr lang="en-US" sz="1050" dirty="0">
-                <a:solidFill>
-                  <a:schemeClr val="tx1"/>
-                </a:solidFill>
-              </a:rPr>
-              <a:t>출처(기관·조사 이름·링크)를 표현했는가</a:t>
-            </a:r>
-            <a:endParaRPr lang="en-US" sz="1050" dirty="0"/>
-          </a:p>
-          <a:p>
-            <a:pPr marL="342900" indent="-342900">
-              <a:spcAft>
-                <a:spcPts val="300"/>
-              </a:spcAft>
-              <a:buSzPct val="100000"/>
-              <a:buChar char="•"/>
-            </a:pPr>
-            <a:r>
-              <a:rPr lang="en-US" sz="1050" dirty="0">
-                <a:solidFill>
-                  <a:schemeClr val="tx1"/>
-                </a:solidFill>
-              </a:rPr>
-              <a:t>모두 조사인지 밝혔는가: '전국 모든 학교가 보고'</a:t>
-            </a:r>
-            <a:endParaRPr lang="en-US" sz="1050" dirty="0"/>
-          </a:p>
-          <a:p>
-            <a:pPr marL="342900" indent="-342900">
-              <a:spcAft>
-                <a:spcPts val="300"/>
-              </a:spcAft>
-              <a:buSzPct val="100000"/>
-              <a:buChar char="•"/>
-            </a:pPr>
-            <a:r>
-              <a:rPr lang="en-US" sz="1050" dirty="0">
-                <a:solidFill>
-                  <a:schemeClr val="tx1"/>
-                </a:solidFill>
-              </a:rPr>
-              <a:t>가공 전·후를 보였고 비율 열을 직접 계산했는가</a:t>
-            </a:r>
-            <a:endParaRPr lang="en-US" sz="1050" dirty="0"/>
-          </a:p>
-        </p:txBody>
-      </p:sp>
-      <p:sp>
-        <p:nvSpPr>
-          <p:cNvPr id="25" name="Slide Number Placeholder 0"/>
-          <p:cNvSpPr>
-            <a:spLocks noGrp="1"/>
-          </p:cNvSpPr>
-          <p:nvPr>
-            <p:ph type="sldNum" sz="quarter" idx="4294967295"/>
-          </p:nvPr>
-        </p:nvSpPr>
-        <p:spPr>
-          <a:xfrm>
-            <a:off x="8229600" y="4754880"/>
-            <a:ext cx="457200" cy="228600"/>
-          </a:xfrm>
-          <a:prstGeom prst="rect">
-            <a:avLst/>
-          </a:prstGeom>
-          <a:extLst>
-            <a:ext uri="{C572A759-6A51-4108-AA02-DFA0A04FC94B}">
-              <ma14:wrappingTextBoxFlag xmlns:ma14="http://schemas.microsoft.com/office/mac/drawingml/2011/main" val="0"/>
-            </a:ext>
-          </a:extLst>
-        </p:spPr>
-        <p:txBody>
-          <a:bodyPr/>
-          <a:lstStyle>
-            <a:lvl1pPr>
-              <a:defRPr sz="900">
-                <a:solidFill>
-                  <a:srgbClr val="6B6759"/>
-                </a:solidFill>
-              </a:defRPr>
-            </a:lvl1pPr>
-          </a:lstStyle>
-          <a:p>
-            <a:pPr algn="r"/>
-            <a:fld id="{F7021451-1387-4CA6-816F-3879F97B5CBC}" type="slidenum">
-              <a:rPr b="0" lang="en-US"/>
-              <a:t>4</a:t>
-            </a:fld>
-            <a:endParaRPr lang="en-US"/>
-          </a:p>
-        </p:txBody>
-      </p:sp>
-    </p:spTree>
-  </p:cSld>
-  <p:clrMapOvr>
-    <a:masterClrMapping/>
-  </p:clrMapOvr>
-</p:sld>
-</file>
-
-<file path=ppt/slides/slide5.xml><?xml version="1.0" encoding="utf-8"?>
-<p:sld xmlns:a="http://schemas.openxmlformats.org/drawingml/2006/main" xmlns:r="http://schemas.openxmlformats.org/officeDocument/2006/relationships" xmlns:p="http://schemas.openxmlformats.org/presentationml/2006/main">
-  <p:cSld name="Slide 5">
+  <p:cSld name="Slide 3">
     <p:spTree>
       <p:nvGrpSpPr>
         <p:cNvPr id="1" name=""/>
@@ -9888,7 +8112,7 @@
             <a:pPr algn="r"/>
             <a:fld id="{F7021451-1387-4CA6-816F-3879F97B5CBC}" type="slidenum">
               <a:rPr b="0" lang="en-US"/>
-              <a:t>5</a:t>
+              <a:t>3</a:t>
             </a:fld>
             <a:endParaRPr lang="en-US"/>
           </a:p>
@@ -9902,726 +8126,9 @@
 </p:sld>
 </file>
 
-<file path=ppt/slides/slide6.xml><?xml version="1.0" encoding="utf-8"?>
+<file path=ppt/slides/slide4.xml><?xml version="1.0" encoding="utf-8"?>
 <p:sld xmlns:a="http://schemas.openxmlformats.org/drawingml/2006/main" xmlns:r="http://schemas.openxmlformats.org/officeDocument/2006/relationships" xmlns:p="http://schemas.openxmlformats.org/presentationml/2006/main">
-  <p:cSld name="Slide 6">
-    <p:spTree>
-      <p:nvGrpSpPr>
-        <p:cNvPr id="1" name=""/>
-        <p:cNvGrpSpPr/>
-        <p:nvPr/>
-      </p:nvGrpSpPr>
-      <p:grpSpPr>
-        <a:xfrm>
-          <a:off x="0" y="0"/>
-          <a:ext cx="0" cy="0"/>
-          <a:chOff x="0" y="0"/>
-          <a:chExt cx="0" cy="0"/>
-        </a:xfrm>
-      </p:grpSpPr>
-      <p:sp>
-        <p:nvSpPr>
-          <p:cNvPr id="2" name="Text 0"/>
-          <p:cNvSpPr/>
-          <p:nvPr>
-            <p:ph idx="100" type="title" hasCustomPrompt="1"/>
-          </p:nvPr>
-        </p:nvSpPr>
-        <p:spPr>
-          <a:xfrm>
-            <a:off x="960120" y="274320"/>
-            <a:ext cx="7726680" cy="548640"/>
-          </a:xfrm>
-          <a:prstGeom prst="rect">
-            <a:avLst/>
-          </a:prstGeom>
-          <a:noFill/>
-          <a:ln/>
-        </p:spPr>
-        <p:txBody>
-          <a:bodyPr wrap="square" lIns="0" tIns="0" rIns="0" bIns="0" rtlCol="0" anchor="ctr"/>
-          <a:lstStyle/>
-          <a:p>
-            <a:pPr algn="l" indent="0" marL="0">
-              <a:buNone/>
-            </a:pPr>
-            <a:r>
-              <a:rPr lang="en-US" sz="2400" b="1" dirty="0">
-                <a:solidFill>
-                  <a:schemeClr val="tx2"/>
-                </a:solidFill>
-              </a:rPr>
-              <a:t>3장 설명 · 핵심 요약</a:t>
-            </a:r>
-            <a:endParaRPr lang="en-US" sz="2400" dirty="0"/>
-          </a:p>
-        </p:txBody>
-      </p:sp>
-      <p:sp>
-        <p:nvSpPr>
-          <p:cNvPr id="3" name="설명 배지 3"/>
-          <p:cNvSpPr/>
-          <p:nvPr/>
-        </p:nvSpPr>
-        <p:spPr>
-          <a:xfrm>
-            <a:off x="457200" y="384048"/>
-            <a:ext cx="420624" cy="329184"/>
-          </a:xfrm>
-          <a:prstGeom prst="roundRect">
-            <a:avLst>
-              <a:gd name="adj" fmla="val 22222"/>
-            </a:avLst>
-          </a:prstGeom>
-          <a:solidFill>
-            <a:schemeClr val="accent1"/>
-          </a:solidFill>
-          <a:ln w="12700">
-            <a:solidFill>
-              <a:schemeClr val="accent1"/>
-            </a:solidFill>
-            <a:prstDash val="solid"/>
-          </a:ln>
-        </p:spPr>
-      </p:sp>
-      <p:sp>
-        <p:nvSpPr>
-          <p:cNvPr id="4" name="설명 배지 글자 3"/>
-          <p:cNvSpPr txBox="1"/>
-          <p:nvPr/>
-        </p:nvSpPr>
-        <p:spPr>
-          <a:xfrm>
-            <a:off x="457200" y="384048"/>
-            <a:ext cx="420624" cy="329184"/>
-          </a:xfrm>
-          <a:prstGeom prst="rect">
-            <a:avLst/>
-          </a:prstGeom>
-          <a:noFill/>
-          <a:ln/>
-        </p:spPr>
-        <p:txBody>
-          <a:bodyPr wrap="square" lIns="0" tIns="0" rIns="0" bIns="0" rtlCol="0" anchor="ctr"/>
-          <a:lstStyle/>
-          <a:p>
-            <a:pPr algn="ctr" indent="0" marL="0">
-              <a:buNone/>
-            </a:pPr>
-            <a:r>
-              <a:rPr lang="en-US" sz="1000" b="1" dirty="0">
-                <a:solidFill>
-                  <a:schemeClr val="bg1"/>
-                </a:solidFill>
-              </a:rPr>
-              <a:t>설명</a:t>
-            </a:r>
-            <a:endParaRPr lang="en-US" sz="1000" dirty="0"/>
-          </a:p>
-        </p:txBody>
-      </p:sp>
-      <p:sp>
-        <p:nvSpPr>
-          <p:cNvPr id="5" name="설명 카드 3-1"/>
-          <p:cNvSpPr/>
-          <p:nvPr/>
-        </p:nvSpPr>
-        <p:spPr>
-          <a:xfrm>
-            <a:off x="457200" y="960120"/>
-            <a:ext cx="4023360" cy="1691640"/>
-          </a:xfrm>
-          <a:prstGeom prst="roundRect">
-            <a:avLst>
-              <a:gd name="adj" fmla="val 3243"/>
-            </a:avLst>
-          </a:prstGeom>
-          <a:solidFill>
-            <a:srgbClr val="FFFFFF"/>
-          </a:solidFill>
-          <a:ln w="9525">
-            <a:solidFill>
-              <a:srgbClr val="DCE5DF"/>
-            </a:solidFill>
-            <a:prstDash val="solid"/>
-          </a:ln>
-        </p:spPr>
-      </p:sp>
-      <p:sp>
-        <p:nvSpPr>
-          <p:cNvPr id="6" name="설명 제목 3-1"/>
-          <p:cNvSpPr txBox="1"/>
-          <p:nvPr/>
-        </p:nvSpPr>
-        <p:spPr>
-          <a:xfrm>
-            <a:off x="621792" y="1051560"/>
-            <a:ext cx="3657600" cy="274320"/>
-          </a:xfrm>
-          <a:prstGeom prst="rect">
-            <a:avLst/>
-          </a:prstGeom>
-          <a:noFill/>
-          <a:ln/>
-        </p:spPr>
-        <p:txBody>
-          <a:bodyPr wrap="square" lIns="0" tIns="0" rIns="0" bIns="0" rtlCol="0" anchor="ctr"/>
-          <a:lstStyle/>
-          <a:p>
-            <a:pPr indent="0" marL="0">
-              <a:buNone/>
-            </a:pPr>
-            <a:r>
-              <a:rPr lang="en-US" sz="1150" b="1" dirty="0">
-                <a:solidFill>
-                  <a:schemeClr val="tx2"/>
-                </a:solidFill>
-              </a:rPr>
-              <a:t>그래프 셋을 같은 연도 축으로</a:t>
-            </a:r>
-            <a:endParaRPr lang="en-US" sz="1150" dirty="0"/>
-          </a:p>
-        </p:txBody>
-      </p:sp>
-      <p:sp>
-        <p:nvSpPr>
-          <p:cNvPr id="7" name="설명 내용 3-1"/>
-          <p:cNvSpPr txBox="1"/>
-          <p:nvPr/>
-        </p:nvSpPr>
-        <p:spPr>
-          <a:xfrm>
-            <a:off x="621792" y="1344168"/>
-            <a:ext cx="3703320" cy="1234440"/>
-          </a:xfrm>
-          <a:prstGeom prst="rect">
-            <a:avLst/>
-          </a:prstGeom>
-          <a:noFill/>
-          <a:ln/>
-        </p:spPr>
-        <p:txBody>
-          <a:bodyPr wrap="square" lIns="0" tIns="0" rIns="0" bIns="0" rtlCol="0" anchor="t">
-            <a:normAutofit/>
-          </a:bodyPr>
-          <a:lstStyle/>
-          <a:p>
-            <a:pPr marL="342900" indent="-342900">
-              <a:spcAft>
-                <a:spcPts val="300"/>
-              </a:spcAft>
-              <a:buSzPct val="100000"/>
-              <a:buChar char="•"/>
-            </a:pPr>
-            <a:r>
-              <a:rPr lang="en-US" sz="1050" dirty="0">
-                <a:solidFill>
-                  <a:schemeClr val="tx1"/>
-                </a:solidFill>
-              </a:rPr>
-              <a:t>전체(줄어듦), 다문화(늘어남), 비율(더 빨리 늘어남)</a:t>
-            </a:r>
-            <a:endParaRPr lang="en-US" sz="1050" dirty="0"/>
-          </a:p>
-          <a:p>
-            <a:pPr marL="342900" indent="-342900">
-              <a:spcAft>
-                <a:spcPts val="300"/>
-              </a:spcAft>
-              <a:buSzPct val="100000"/>
-              <a:buChar char="•"/>
-            </a:pPr>
-            <a:r>
-              <a:rPr lang="en-US" sz="1050" dirty="0">
-                <a:solidFill>
-                  <a:schemeClr val="tx1"/>
-                </a:solidFill>
-              </a:rPr>
-              <a:t>크기가 다른 세 값을 한 축에 겹치지 않고 따로 그렸다</a:t>
-            </a:r>
-            <a:endParaRPr lang="en-US" sz="1050" dirty="0"/>
-          </a:p>
-          <a:p>
-            <a:pPr marL="342900" indent="-342900">
-              <a:spcAft>
-                <a:spcPts val="300"/>
-              </a:spcAft>
-              <a:buSzPct val="100000"/>
-              <a:buChar char="•"/>
-            </a:pPr>
-            <a:r>
-              <a:rPr lang="en-US" sz="1050" dirty="0">
-                <a:solidFill>
-                  <a:schemeClr val="tx1"/>
-                </a:solidFill>
-              </a:rPr>
-              <a:t>세로축은 모두 0부터</a:t>
-            </a:r>
-            <a:endParaRPr lang="en-US" sz="1050" dirty="0"/>
-          </a:p>
-        </p:txBody>
-      </p:sp>
-      <p:sp>
-        <p:nvSpPr>
-          <p:cNvPr id="8" name="설명 카드 3-2"/>
-          <p:cNvSpPr/>
-          <p:nvPr/>
-        </p:nvSpPr>
-        <p:spPr>
-          <a:xfrm>
-            <a:off x="4663440" y="960120"/>
-            <a:ext cx="4023360" cy="1691640"/>
-          </a:xfrm>
-          <a:prstGeom prst="roundRect">
-            <a:avLst>
-              <a:gd name="adj" fmla="val 3243"/>
-            </a:avLst>
-          </a:prstGeom>
-          <a:solidFill>
-            <a:srgbClr val="FFFFFF"/>
-          </a:solidFill>
-          <a:ln w="9525">
-            <a:solidFill>
-              <a:srgbClr val="DCE5DF"/>
-            </a:solidFill>
-            <a:prstDash val="solid"/>
-          </a:ln>
-        </p:spPr>
-      </p:sp>
-      <p:sp>
-        <p:nvSpPr>
-          <p:cNvPr id="9" name="설명 제목 3-2"/>
-          <p:cNvSpPr txBox="1"/>
-          <p:nvPr/>
-        </p:nvSpPr>
-        <p:spPr>
-          <a:xfrm>
-            <a:off x="4828032" y="1051560"/>
-            <a:ext cx="3657600" cy="274320"/>
-          </a:xfrm>
-          <a:prstGeom prst="rect">
-            <a:avLst/>
-          </a:prstGeom>
-          <a:noFill/>
-          <a:ln/>
-        </p:spPr>
-        <p:txBody>
-          <a:bodyPr wrap="square" lIns="0" tIns="0" rIns="0" bIns="0" rtlCol="0" anchor="ctr"/>
-          <a:lstStyle/>
-          <a:p>
-            <a:pPr indent="0" marL="0">
-              <a:buNone/>
-            </a:pPr>
-            <a:r>
-              <a:rPr lang="en-US" sz="1150" b="1" dirty="0">
-                <a:solidFill>
-                  <a:schemeClr val="tx2"/>
-                </a:solidFill>
-              </a:rPr>
-              <a:t>학급 단위로 바꾸기</a:t>
-            </a:r>
-            <a:endParaRPr lang="en-US" sz="1150" dirty="0"/>
-          </a:p>
-        </p:txBody>
-      </p:sp>
-      <p:sp>
-        <p:nvSpPr>
-          <p:cNvPr id="10" name="설명 내용 3-2"/>
-          <p:cNvSpPr txBox="1"/>
-          <p:nvPr/>
-        </p:nvSpPr>
-        <p:spPr>
-          <a:xfrm>
-            <a:off x="4828032" y="1344168"/>
-            <a:ext cx="3703320" cy="1234440"/>
-          </a:xfrm>
-          <a:prstGeom prst="rect">
-            <a:avLst/>
-          </a:prstGeom>
-          <a:noFill/>
-          <a:ln/>
-        </p:spPr>
-        <p:txBody>
-          <a:bodyPr wrap="square" lIns="0" tIns="0" rIns="0" bIns="0" rtlCol="0" anchor="t">
-            <a:normAutofit/>
-          </a:bodyPr>
-          <a:lstStyle/>
-          <a:p>
-            <a:pPr marL="342900" indent="-342900">
-              <a:spcAft>
-                <a:spcPts val="300"/>
-              </a:spcAft>
-              <a:buSzPct val="100000"/>
-              <a:buChar char="•"/>
-            </a:pPr>
-            <a:r>
-              <a:rPr lang="en-US" sz="1050" dirty="0">
-                <a:solidFill>
-                  <a:schemeClr val="tx1"/>
-                </a:solidFill>
-              </a:rPr>
-              <a:t>비율 4.0% × 30명 = 1.2명 → "한 반에 평균 한 명 이상"으로 읽는다</a:t>
-            </a:r>
-            <a:endParaRPr lang="en-US" sz="1050" dirty="0"/>
-          </a:p>
-          <a:p>
-            <a:pPr marL="342900" indent="-342900">
-              <a:spcAft>
-                <a:spcPts val="300"/>
-              </a:spcAft>
-              <a:buSzPct val="100000"/>
-              <a:buChar char="•"/>
-            </a:pPr>
-            <a:r>
-              <a:rPr lang="en-US" sz="1050" dirty="0">
-                <a:solidFill>
-                  <a:schemeClr val="tx1"/>
-                </a:solidFill>
-              </a:rPr>
-              <a:t>확률분포표 없이도 비율로 바로 계산할 수 있다</a:t>
-            </a:r>
-            <a:endParaRPr lang="en-US" sz="1050" dirty="0"/>
-          </a:p>
-        </p:txBody>
-      </p:sp>
-      <p:sp>
-        <p:nvSpPr>
-          <p:cNvPr id="11" name="설명 카드 3-3"/>
-          <p:cNvSpPr/>
-          <p:nvPr/>
-        </p:nvSpPr>
-        <p:spPr>
-          <a:xfrm>
-            <a:off x="457200" y="2788920"/>
-            <a:ext cx="4023360" cy="1691640"/>
-          </a:xfrm>
-          <a:prstGeom prst="roundRect">
-            <a:avLst>
-              <a:gd name="adj" fmla="val 3243"/>
-            </a:avLst>
-          </a:prstGeom>
-          <a:solidFill>
-            <a:srgbClr val="FFFFFF"/>
-          </a:solidFill>
-          <a:ln w="9525">
-            <a:solidFill>
-              <a:srgbClr val="DCE5DF"/>
-            </a:solidFill>
-            <a:prstDash val="solid"/>
-          </a:ln>
-        </p:spPr>
-      </p:sp>
-      <p:sp>
-        <p:nvSpPr>
-          <p:cNvPr id="12" name="설명 제목 3-3"/>
-          <p:cNvSpPr txBox="1"/>
-          <p:nvPr/>
-        </p:nvSpPr>
-        <p:spPr>
-          <a:xfrm>
-            <a:off x="621792" y="2880360"/>
-            <a:ext cx="3657600" cy="274320"/>
-          </a:xfrm>
-          <a:prstGeom prst="rect">
-            <a:avLst/>
-          </a:prstGeom>
-          <a:noFill/>
-          <a:ln/>
-        </p:spPr>
-        <p:txBody>
-          <a:bodyPr wrap="square" lIns="0" tIns="0" rIns="0" bIns="0" rtlCol="0" anchor="ctr"/>
-          <a:lstStyle/>
-          <a:p>
-            <a:pPr indent="0" marL="0">
-              <a:buNone/>
-            </a:pPr>
-            <a:r>
-              <a:rPr lang="en-US" sz="1150" b="1" dirty="0">
-                <a:solidFill>
-                  <a:schemeClr val="tx2"/>
-                </a:solidFill>
-              </a:rPr>
-              <a:t>의견과 근거를 잇는 법</a:t>
-            </a:r>
-            <a:endParaRPr lang="en-US" sz="1150" dirty="0"/>
-          </a:p>
-        </p:txBody>
-      </p:sp>
-      <p:sp>
-        <p:nvSpPr>
-          <p:cNvPr id="13" name="설명 내용 3-3"/>
-          <p:cNvSpPr txBox="1"/>
-          <p:nvPr/>
-        </p:nvSpPr>
-        <p:spPr>
-          <a:xfrm>
-            <a:off x="621792" y="3172968"/>
-            <a:ext cx="3703320" cy="1234440"/>
-          </a:xfrm>
-          <a:prstGeom prst="rect">
-            <a:avLst/>
-          </a:prstGeom>
-          <a:noFill/>
-          <a:ln/>
-        </p:spPr>
-        <p:txBody>
-          <a:bodyPr wrap="square" lIns="0" tIns="0" rIns="0" bIns="0" rtlCol="0" anchor="t">
-            <a:normAutofit/>
-          </a:bodyPr>
-          <a:lstStyle/>
-          <a:p>
-            <a:pPr marL="342900" indent="-342900">
-              <a:spcAft>
-                <a:spcPts val="300"/>
-              </a:spcAft>
-              <a:buSzPct val="100000"/>
-              <a:buChar char="•"/>
-            </a:pPr>
-            <a:r>
-              <a:rPr lang="en-US" sz="1050" dirty="0">
-                <a:solidFill>
-                  <a:schemeClr val="tx1"/>
-                </a:solidFill>
-              </a:rPr>
-              <a:t>②는 추측: '비율은 앞으로 더 빨리 오른다'</a:t>
-            </a:r>
-            <a:endParaRPr lang="en-US" sz="1050" dirty="0"/>
-          </a:p>
-          <a:p>
-            <a:pPr marL="342900" indent="-342900">
-              <a:spcAft>
-                <a:spcPts val="300"/>
-              </a:spcAft>
-              <a:buSzPct val="100000"/>
-              <a:buChar char="•"/>
-            </a:pPr>
-            <a:r>
-              <a:rPr lang="en-US" sz="1050" dirty="0">
-                <a:solidFill>
-                  <a:schemeClr val="tx1"/>
-                </a:solidFill>
-              </a:rPr>
-              <a:t>③은 근거: 같은 통계의 전체 학생 수(분모) 변화, 2024→2025 증감</a:t>
-            </a:r>
-            <a:endParaRPr lang="en-US" sz="1050" dirty="0"/>
-          </a:p>
-          <a:p>
-            <a:pPr marL="342900" indent="-342900">
-              <a:spcAft>
-                <a:spcPts val="300"/>
-              </a:spcAft>
-              <a:buSzPct val="100000"/>
-              <a:buChar char="•"/>
-            </a:pPr>
-            <a:r>
-              <a:rPr lang="en-US" sz="1050" dirty="0">
-                <a:solidFill>
-                  <a:schemeClr val="tx1"/>
-                </a:solidFill>
-              </a:rPr>
-              <a:t>분모가 줄고 분자가 늘면 비율은 반드시 오른다는 계산으로 잇는다</a:t>
-            </a:r>
-            <a:endParaRPr lang="en-US" sz="1050" dirty="0"/>
-          </a:p>
-        </p:txBody>
-      </p:sp>
-      <p:sp>
-        <p:nvSpPr>
-          <p:cNvPr id="14" name="설명 카드 3-4"/>
-          <p:cNvSpPr/>
-          <p:nvPr/>
-        </p:nvSpPr>
-        <p:spPr>
-          <a:xfrm>
-            <a:off x="4663440" y="2788920"/>
-            <a:ext cx="4023360" cy="1691640"/>
-          </a:xfrm>
-          <a:prstGeom prst="roundRect">
-            <a:avLst>
-              <a:gd name="adj" fmla="val 3243"/>
-            </a:avLst>
-          </a:prstGeom>
-          <a:solidFill>
-            <a:srgbClr val="FFFFFF"/>
-          </a:solidFill>
-          <a:ln w="9525">
-            <a:solidFill>
-              <a:srgbClr val="DCE5DF"/>
-            </a:solidFill>
-            <a:prstDash val="solid"/>
-          </a:ln>
-        </p:spPr>
-      </p:sp>
-      <p:sp>
-        <p:nvSpPr>
-          <p:cNvPr id="15" name="설명 제목 3-4"/>
-          <p:cNvSpPr txBox="1"/>
-          <p:nvPr/>
-        </p:nvSpPr>
-        <p:spPr>
-          <a:xfrm>
-            <a:off x="4828032" y="2880360"/>
-            <a:ext cx="3657600" cy="274320"/>
-          </a:xfrm>
-          <a:prstGeom prst="rect">
-            <a:avLst/>
-          </a:prstGeom>
-          <a:noFill/>
-          <a:ln/>
-        </p:spPr>
-        <p:txBody>
-          <a:bodyPr wrap="square" lIns="0" tIns="0" rIns="0" bIns="0" rtlCol="0" anchor="ctr"/>
-          <a:lstStyle/>
-          <a:p>
-            <a:pPr indent="0" marL="0">
-              <a:buNone/>
-            </a:pPr>
-            <a:r>
-              <a:rPr lang="en-US" sz="1150" b="1" dirty="0">
-                <a:solidFill>
-                  <a:schemeClr val="tx2"/>
-                </a:solidFill>
-              </a:rPr>
-              <a:t>채점 연결</a:t>
-            </a:r>
-            <a:endParaRPr lang="en-US" sz="1150" dirty="0"/>
-          </a:p>
-        </p:txBody>
-      </p:sp>
-      <p:sp>
-        <p:nvSpPr>
-          <p:cNvPr id="16" name="설명 내용 3-4"/>
-          <p:cNvSpPr txBox="1"/>
-          <p:nvPr/>
-        </p:nvSpPr>
-        <p:spPr>
-          <a:xfrm>
-            <a:off x="4828032" y="3172968"/>
-            <a:ext cx="3703320" cy="1234440"/>
-          </a:xfrm>
-          <a:prstGeom prst="rect">
-            <a:avLst/>
-          </a:prstGeom>
-          <a:noFill/>
-          <a:ln/>
-        </p:spPr>
-        <p:txBody>
-          <a:bodyPr wrap="square" lIns="0" tIns="0" rIns="0" bIns="0" rtlCol="0" anchor="t">
-            <a:normAutofit/>
-          </a:bodyPr>
-          <a:lstStyle/>
-          <a:p>
-            <a:pPr marL="342900" indent="-342900">
-              <a:spcAft>
-                <a:spcPts val="300"/>
-              </a:spcAft>
-              <a:buSzPct val="100000"/>
-              <a:buChar char="•"/>
-            </a:pPr>
-            <a:r>
-              <a:rPr lang="en-US" sz="1050" dirty="0">
-                <a:solidFill>
-                  <a:schemeClr val="tx1"/>
-                </a:solidFill>
-              </a:rPr>
-              <a:t>수·전체·비율의 변화를 모두 숫자로 표현했는가(①)</a:t>
-            </a:r>
-            <a:endParaRPr lang="en-US" sz="1050" dirty="0"/>
-          </a:p>
-          <a:p>
-            <a:pPr marL="342900" indent="-342900">
-              <a:spcAft>
-                <a:spcPts val="300"/>
-              </a:spcAft>
-              <a:buSzPct val="100000"/>
-              <a:buChar char="•"/>
-            </a:pPr>
-            <a:r>
-              <a:rPr lang="en-US" sz="1050" dirty="0">
-                <a:solidFill>
-                  <a:schemeClr val="tx1"/>
-                </a:solidFill>
-              </a:rPr>
-              <a:t>가공된 자료로 추측을 했는가(②)</a:t>
-            </a:r>
-            <a:endParaRPr lang="en-US" sz="1050" dirty="0"/>
-          </a:p>
-          <a:p>
-            <a:pPr marL="342900" indent="-342900">
-              <a:spcAft>
-                <a:spcPts val="300"/>
-              </a:spcAft>
-              <a:buSzPct val="100000"/>
-              <a:buChar char="•"/>
-            </a:pPr>
-            <a:r>
-              <a:rPr lang="en-US" sz="1050" dirty="0">
-                <a:solidFill>
-                  <a:schemeClr val="tx1"/>
-                </a:solidFill>
-              </a:rPr>
-              <a:t>추측의 근거가 있는가(③, 분모의 변화)</a:t>
-            </a:r>
-            <a:endParaRPr lang="en-US" sz="1050" dirty="0"/>
-          </a:p>
-        </p:txBody>
-      </p:sp>
-      <p:sp>
-        <p:nvSpPr>
-          <p:cNvPr id="25" name="Slide Number Placeholder 0"/>
-          <p:cNvSpPr>
-            <a:spLocks noGrp="1"/>
-          </p:cNvSpPr>
-          <p:nvPr>
-            <p:ph type="sldNum" sz="quarter" idx="4294967295"/>
-          </p:nvPr>
-        </p:nvSpPr>
-        <p:spPr>
-          <a:xfrm>
-            <a:off x="8229600" y="4754880"/>
-            <a:ext cx="457200" cy="228600"/>
-          </a:xfrm>
-          <a:prstGeom prst="rect">
-            <a:avLst/>
-          </a:prstGeom>
-          <a:extLst>
-            <a:ext uri="{C572A759-6A51-4108-AA02-DFA0A04FC94B}">
-              <ma14:wrappingTextBoxFlag xmlns:ma14="http://schemas.microsoft.com/office/mac/drawingml/2011/main" val="0"/>
-            </a:ext>
-          </a:extLst>
-        </p:spPr>
-        <p:txBody>
-          <a:bodyPr/>
-          <a:lstStyle>
-            <a:lvl1pPr>
-              <a:defRPr sz="900">
-                <a:solidFill>
-                  <a:srgbClr val="6B6759"/>
-                </a:solidFill>
-              </a:defRPr>
-            </a:lvl1pPr>
-          </a:lstStyle>
-          <a:p>
-            <a:pPr algn="r"/>
-            <a:fld id="{F7021451-1387-4CA6-816F-3879F97B5CBC}" type="slidenum">
-              <a:rPr b="0" lang="en-US"/>
-              <a:t>6</a:t>
-            </a:fld>
-            <a:endParaRPr lang="en-US"/>
-          </a:p>
-        </p:txBody>
-      </p:sp>
-    </p:spTree>
-  </p:cSld>
-  <p:clrMapOvr>
-    <a:masterClrMapping/>
-  </p:clrMapOvr>
-</p:sld>
-</file>
-
-<file path=ppt/slides/slide7.xml><?xml version="1.0" encoding="utf-8"?>
-<p:sld xmlns:a="http://schemas.openxmlformats.org/drawingml/2006/main" xmlns:r="http://schemas.openxmlformats.org/officeDocument/2006/relationships" xmlns:p="http://schemas.openxmlformats.org/presentationml/2006/main">
-  <p:cSld name="Slide 7">
+  <p:cSld name="Slide 4">
     <p:spTree>
       <p:nvGrpSpPr>
         <p:cNvPr id="1" name=""/>
@@ -10830,7 +8337,7 @@
                   <a:schemeClr val="tx1"/>
                 </a:solidFill>
               </a:rPr>
-              <a:t>전체 학생은 5년간 30.8만 명 줄고 다문화 학생은 4.2만 명 늘어, 비율이 3.0%에서 4.0%가 됐다. 30명 학급이면 평균 1.2명이다.</a:t>
+              <a:t>전체 학생은 5년간 30.8만 명 줄고 다문화 학생은 4.2만 명 늘어, 비율이 3.0%에서 4.0%가 됐다. 25명 학급이면 평균 1명이다.</a:t>
             </a:r>
             <a:endParaRPr lang="en-US" sz="1300" dirty="0"/>
           </a:p>
@@ -10931,7 +8438,7 @@
                   <a:schemeClr val="tx1"/>
                 </a:solidFill>
               </a:rPr>
-              <a:t>지금 추세(다문화 해마다 약 1만 명 증가, 전체 약 7.7만 명 감소)가 이어지면 2030년에는 다문화 약 25.5만 명, 전체 약 463만 명으로 비율 5.5%, 30명 학급에 1.6명이다. 교사를 지망하는 학생은 한국어·다문화 교육을 고민하고 대비해야 한다.</a:t>
+              <a:t>다문화 학생 대부분은 우리나라에서 나고 자란 학생이다. 교사에게 필요한 것은 특별한 보충 수업보다 서로 다른 가정 배경을 이해하고 편견 없이 대하는 태도, 그리고 부모와 소통하는 방법이다.</a:t>
             </a:r>
             <a:endParaRPr lang="en-US" sz="1300" dirty="0"/>
           </a:p>
@@ -11032,7 +8539,7 @@
                   <a:schemeClr val="tx1"/>
                 </a:solidFill>
               </a:rPr>
-              <a:t>나는 교육대학 진학을 희망하며, 진학하면 다문화 교육과 한국어(KSL) 교육 과목을 이수하겠다. 지금은 우리 학교의 한국어 학급이나 다문화 학생 멘토링 봉사에 참여해 교실을 미리 경험하겠다.</a:t>
+              <a:t>다문화 학생이 한 반에 한 명 이상 있는 교실이 보통이 되는 만큼, 교사를 지망하는 학생은 다문화 학생을 어떻게 이해하고 가르칠지 여러 생각과 고민을 미리 하고 있어야 한다.</a:t>
             </a:r>
             <a:endParaRPr lang="en-US" sz="1300" dirty="0"/>
           </a:p>
@@ -11077,670 +8584,7 @@
             <a:pPr algn="r"/>
             <a:fld id="{F7021451-1387-4CA6-816F-3879F97B5CBC}" type="slidenum">
               <a:rPr b="0" lang="en-US"/>
-              <a:t>7</a:t>
-            </a:fld>
-            <a:endParaRPr lang="en-US"/>
-          </a:p>
-        </p:txBody>
-      </p:sp>
-    </p:spTree>
-  </p:cSld>
-  <p:clrMapOvr>
-    <a:masterClrMapping/>
-  </p:clrMapOvr>
-</p:sld>
-</file>
-
-<file path=ppt/slides/slide8.xml><?xml version="1.0" encoding="utf-8"?>
-<p:sld xmlns:a="http://schemas.openxmlformats.org/drawingml/2006/main" xmlns:r="http://schemas.openxmlformats.org/officeDocument/2006/relationships" xmlns:p="http://schemas.openxmlformats.org/presentationml/2006/main">
-  <p:cSld name="Slide 8">
-    <p:spTree>
-      <p:nvGrpSpPr>
-        <p:cNvPr id="1" name=""/>
-        <p:cNvGrpSpPr/>
-        <p:nvPr/>
-      </p:nvGrpSpPr>
-      <p:grpSpPr>
-        <a:xfrm>
-          <a:off x="0" y="0"/>
-          <a:ext cx="0" cy="0"/>
-          <a:chOff x="0" y="0"/>
-          <a:chExt cx="0" cy="0"/>
-        </a:xfrm>
-      </p:grpSpPr>
-      <p:sp>
-        <p:nvSpPr>
-          <p:cNvPr id="2" name="Text 0"/>
-          <p:cNvSpPr/>
-          <p:nvPr>
-            <p:ph idx="100" type="title" hasCustomPrompt="1"/>
-          </p:nvPr>
-        </p:nvSpPr>
-        <p:spPr>
-          <a:xfrm>
-            <a:off x="960120" y="274320"/>
-            <a:ext cx="7726680" cy="548640"/>
-          </a:xfrm>
-          <a:prstGeom prst="rect">
-            <a:avLst/>
-          </a:prstGeom>
-          <a:noFill/>
-          <a:ln/>
-        </p:spPr>
-        <p:txBody>
-          <a:bodyPr wrap="square" lIns="0" tIns="0" rIns="0" bIns="0" rtlCol="0" anchor="ctr"/>
-          <a:lstStyle/>
-          <a:p>
-            <a:pPr algn="l" indent="0" marL="0">
-              <a:buNone/>
-            </a:pPr>
-            <a:r>
-              <a:rPr lang="en-US" sz="2400" b="1" dirty="0">
-                <a:solidFill>
-                  <a:schemeClr val="tx2"/>
-                </a:solidFill>
-              </a:rPr>
-              <a:t>4장 설명 · 핵심 요약</a:t>
-            </a:r>
-            <a:endParaRPr lang="en-US" sz="2400" dirty="0"/>
-          </a:p>
-        </p:txBody>
-      </p:sp>
-      <p:sp>
-        <p:nvSpPr>
-          <p:cNvPr id="3" name="설명 배지 4"/>
-          <p:cNvSpPr/>
-          <p:nvPr/>
-        </p:nvSpPr>
-        <p:spPr>
-          <a:xfrm>
-            <a:off x="457200" y="384048"/>
-            <a:ext cx="420624" cy="329184"/>
-          </a:xfrm>
-          <a:prstGeom prst="roundRect">
-            <a:avLst>
-              <a:gd name="adj" fmla="val 22222"/>
-            </a:avLst>
-          </a:prstGeom>
-          <a:solidFill>
-            <a:schemeClr val="accent1"/>
-          </a:solidFill>
-          <a:ln w="12700">
-            <a:solidFill>
-              <a:schemeClr val="accent1"/>
-            </a:solidFill>
-            <a:prstDash val="solid"/>
-          </a:ln>
-        </p:spPr>
-      </p:sp>
-      <p:sp>
-        <p:nvSpPr>
-          <p:cNvPr id="4" name="설명 배지 글자 4"/>
-          <p:cNvSpPr txBox="1"/>
-          <p:nvPr/>
-        </p:nvSpPr>
-        <p:spPr>
-          <a:xfrm>
-            <a:off x="457200" y="384048"/>
-            <a:ext cx="420624" cy="329184"/>
-          </a:xfrm>
-          <a:prstGeom prst="rect">
-            <a:avLst/>
-          </a:prstGeom>
-          <a:noFill/>
-          <a:ln/>
-        </p:spPr>
-        <p:txBody>
-          <a:bodyPr wrap="square" lIns="0" tIns="0" rIns="0" bIns="0" rtlCol="0" anchor="ctr"/>
-          <a:lstStyle/>
-          <a:p>
-            <a:pPr algn="ctr" indent="0" marL="0">
-              <a:buNone/>
-            </a:pPr>
-            <a:r>
-              <a:rPr lang="en-US" sz="1000" b="1" dirty="0">
-                <a:solidFill>
-                  <a:schemeClr val="bg1"/>
-                </a:solidFill>
-              </a:rPr>
-              <a:t>설명</a:t>
-            </a:r>
-            <a:endParaRPr lang="en-US" sz="1000" dirty="0"/>
-          </a:p>
-        </p:txBody>
-      </p:sp>
-      <p:sp>
-        <p:nvSpPr>
-          <p:cNvPr id="5" name="설명 카드 4-1"/>
-          <p:cNvSpPr/>
-          <p:nvPr/>
-        </p:nvSpPr>
-        <p:spPr>
-          <a:xfrm>
-            <a:off x="457200" y="960120"/>
-            <a:ext cx="4023360" cy="1691640"/>
-          </a:xfrm>
-          <a:prstGeom prst="roundRect">
-            <a:avLst>
-              <a:gd name="adj" fmla="val 3243"/>
-            </a:avLst>
-          </a:prstGeom>
-          <a:solidFill>
-            <a:srgbClr val="FFFFFF"/>
-          </a:solidFill>
-          <a:ln w="9525">
-            <a:solidFill>
-              <a:srgbClr val="DCE5DF"/>
-            </a:solidFill>
-            <a:prstDash val="solid"/>
-          </a:ln>
-        </p:spPr>
-      </p:sp>
-      <p:sp>
-        <p:nvSpPr>
-          <p:cNvPr id="6" name="설명 제목 4-1"/>
-          <p:cNvSpPr txBox="1"/>
-          <p:nvPr/>
-        </p:nvSpPr>
-        <p:spPr>
-          <a:xfrm>
-            <a:off x="621792" y="1051560"/>
-            <a:ext cx="3657600" cy="274320"/>
-          </a:xfrm>
-          <a:prstGeom prst="rect">
-            <a:avLst/>
-          </a:prstGeom>
-          <a:noFill/>
-          <a:ln/>
-        </p:spPr>
-        <p:txBody>
-          <a:bodyPr wrap="square" lIns="0" tIns="0" rIns="0" bIns="0" rtlCol="0" anchor="ctr"/>
-          <a:lstStyle/>
-          <a:p>
-            <a:pPr indent="0" marL="0">
-              <a:buNone/>
-            </a:pPr>
-            <a:r>
-              <a:rPr lang="en-US" sz="1150" b="1" dirty="0">
-                <a:solidFill>
-                  <a:schemeClr val="tx2"/>
-                </a:solidFill>
-              </a:rPr>
-              <a:t>결론의 구조</a:t>
-            </a:r>
-            <a:endParaRPr lang="en-US" sz="1150" dirty="0"/>
-          </a:p>
-        </p:txBody>
-      </p:sp>
-      <p:sp>
-        <p:nvSpPr>
-          <p:cNvPr id="7" name="설명 내용 4-1"/>
-          <p:cNvSpPr txBox="1"/>
-          <p:nvPr/>
-        </p:nvSpPr>
-        <p:spPr>
-          <a:xfrm>
-            <a:off x="621792" y="1344168"/>
-            <a:ext cx="3703320" cy="1234440"/>
-          </a:xfrm>
-          <a:prstGeom prst="rect">
-            <a:avLst/>
-          </a:prstGeom>
-          <a:noFill/>
-          <a:ln/>
-        </p:spPr>
-        <p:txBody>
-          <a:bodyPr wrap="square" lIns="0" tIns="0" rIns="0" bIns="0" rtlCol="0" anchor="t">
-            <a:normAutofit/>
-          </a:bodyPr>
-          <a:lstStyle/>
-          <a:p>
-            <a:pPr marL="342900" indent="-342900">
-              <a:spcAft>
-                <a:spcPts val="300"/>
-              </a:spcAft>
-              <a:buSzPct val="100000"/>
-              <a:buChar char="•"/>
-            </a:pPr>
-            <a:r>
-              <a:rPr lang="en-US" sz="1050" dirty="0">
-                <a:solidFill>
-                  <a:schemeClr val="tx1"/>
-                </a:solidFill>
-              </a:rPr>
-              <a:t>통계가 보여 준 것(5년의 변화를 숫자로) → 통계 분석(전망 + 대비) → 결론(내가 할 일)</a:t>
-            </a:r>
-            <a:endParaRPr lang="en-US" sz="1050" dirty="0"/>
-          </a:p>
-          <a:p>
-            <a:pPr marL="342900" indent="-342900">
-              <a:spcAft>
-                <a:spcPts val="300"/>
-              </a:spcAft>
-              <a:buSzPct val="100000"/>
-              <a:buChar char="•"/>
-            </a:pPr>
-            <a:r>
-              <a:rPr lang="en-US" sz="1050" dirty="0">
-                <a:solidFill>
-                  <a:schemeClr val="tx1"/>
-                </a:solidFill>
-              </a:rPr>
-              <a:t>'한 반에 1.2명'처럼 학급 단위로 바꾸면 와닿는다</a:t>
-            </a:r>
-            <a:endParaRPr lang="en-US" sz="1050" dirty="0"/>
-          </a:p>
-        </p:txBody>
-      </p:sp>
-      <p:sp>
-        <p:nvSpPr>
-          <p:cNvPr id="8" name="설명 카드 4-2"/>
-          <p:cNvSpPr/>
-          <p:nvPr/>
-        </p:nvSpPr>
-        <p:spPr>
-          <a:xfrm>
-            <a:off x="4663440" y="960120"/>
-            <a:ext cx="4023360" cy="1691640"/>
-          </a:xfrm>
-          <a:prstGeom prst="roundRect">
-            <a:avLst>
-              <a:gd name="adj" fmla="val 3243"/>
-            </a:avLst>
-          </a:prstGeom>
-          <a:solidFill>
-            <a:srgbClr val="FFFFFF"/>
-          </a:solidFill>
-          <a:ln w="9525">
-            <a:solidFill>
-              <a:srgbClr val="DCE5DF"/>
-            </a:solidFill>
-            <a:prstDash val="solid"/>
-          </a:ln>
-        </p:spPr>
-      </p:sp>
-      <p:sp>
-        <p:nvSpPr>
-          <p:cNvPr id="9" name="설명 제목 4-2"/>
-          <p:cNvSpPr txBox="1"/>
-          <p:nvPr/>
-        </p:nvSpPr>
-        <p:spPr>
-          <a:xfrm>
-            <a:off x="4828032" y="1051560"/>
-            <a:ext cx="3657600" cy="274320"/>
-          </a:xfrm>
-          <a:prstGeom prst="rect">
-            <a:avLst/>
-          </a:prstGeom>
-          <a:noFill/>
-          <a:ln/>
-        </p:spPr>
-        <p:txBody>
-          <a:bodyPr wrap="square" lIns="0" tIns="0" rIns="0" bIns="0" rtlCol="0" anchor="ctr"/>
-          <a:lstStyle/>
-          <a:p>
-            <a:pPr indent="0" marL="0">
-              <a:buNone/>
-            </a:pPr>
-            <a:r>
-              <a:rPr lang="en-US" sz="1150" b="1" dirty="0">
-                <a:solidFill>
-                  <a:schemeClr val="tx2"/>
-                </a:solidFill>
-              </a:rPr>
-              <a:t>전망의 계산</a:t>
-            </a:r>
-            <a:endParaRPr lang="en-US" sz="1150" dirty="0"/>
-          </a:p>
-        </p:txBody>
-      </p:sp>
-      <p:sp>
-        <p:nvSpPr>
-          <p:cNvPr id="10" name="설명 내용 4-2"/>
-          <p:cNvSpPr txBox="1"/>
-          <p:nvPr/>
-        </p:nvSpPr>
-        <p:spPr>
-          <a:xfrm>
-            <a:off x="4828032" y="1344168"/>
-            <a:ext cx="3703320" cy="1234440"/>
-          </a:xfrm>
-          <a:prstGeom prst="rect">
-            <a:avLst/>
-          </a:prstGeom>
-          <a:noFill/>
-          <a:ln/>
-        </p:spPr>
-        <p:txBody>
-          <a:bodyPr wrap="square" lIns="0" tIns="0" rIns="0" bIns="0" rtlCol="0" anchor="t">
-            <a:normAutofit/>
-          </a:bodyPr>
-          <a:lstStyle/>
-          <a:p>
-            <a:pPr marL="342900" indent="-342900">
-              <a:spcAft>
-                <a:spcPts val="300"/>
-              </a:spcAft>
-              <a:buSzPct val="100000"/>
-              <a:buChar char="•"/>
-            </a:pPr>
-            <a:r>
-              <a:rPr lang="en-US" sz="1050" dirty="0">
-                <a:solidFill>
-                  <a:schemeClr val="tx1"/>
-                </a:solidFill>
-              </a:rPr>
-              <a:t>2021~2025 평균 변화(다문화 +1.05만/년, 전체 −7.7만/년)를 5년 더 이어 간 가정</a:t>
-            </a:r>
-            <a:endParaRPr lang="en-US" sz="1050" dirty="0"/>
-          </a:p>
-          <a:p>
-            <a:pPr marL="342900" indent="-342900">
-              <a:spcAft>
-                <a:spcPts val="300"/>
-              </a:spcAft>
-              <a:buSzPct val="100000"/>
-              <a:buChar char="•"/>
-            </a:pPr>
-            <a:r>
-              <a:rPr lang="en-US" sz="1050" dirty="0">
-                <a:solidFill>
-                  <a:schemeClr val="tx1"/>
-                </a:solidFill>
-              </a:rPr>
-              <a:t>2030년 25.5만 ÷ 463만 = 5.5% → 30명 × 0.055 = 1.6명</a:t>
-            </a:r>
-            <a:endParaRPr lang="en-US" sz="1050" dirty="0"/>
-          </a:p>
-        </p:txBody>
-      </p:sp>
-      <p:sp>
-        <p:nvSpPr>
-          <p:cNvPr id="11" name="설명 카드 4-3"/>
-          <p:cNvSpPr/>
-          <p:nvPr/>
-        </p:nvSpPr>
-        <p:spPr>
-          <a:xfrm>
-            <a:off x="457200" y="2788920"/>
-            <a:ext cx="4023360" cy="1691640"/>
-          </a:xfrm>
-          <a:prstGeom prst="roundRect">
-            <a:avLst>
-              <a:gd name="adj" fmla="val 3243"/>
-            </a:avLst>
-          </a:prstGeom>
-          <a:solidFill>
-            <a:srgbClr val="FFFFFF"/>
-          </a:solidFill>
-          <a:ln w="9525">
-            <a:solidFill>
-              <a:srgbClr val="DCE5DF"/>
-            </a:solidFill>
-            <a:prstDash val="solid"/>
-          </a:ln>
-        </p:spPr>
-      </p:sp>
-      <p:sp>
-        <p:nvSpPr>
-          <p:cNvPr id="12" name="설명 제목 4-3"/>
-          <p:cNvSpPr txBox="1"/>
-          <p:nvPr/>
-        </p:nvSpPr>
-        <p:spPr>
-          <a:xfrm>
-            <a:off x="621792" y="2880360"/>
-            <a:ext cx="3657600" cy="274320"/>
-          </a:xfrm>
-          <a:prstGeom prst="rect">
-            <a:avLst/>
-          </a:prstGeom>
-          <a:noFill/>
-          <a:ln/>
-        </p:spPr>
-        <p:txBody>
-          <a:bodyPr wrap="square" lIns="0" tIns="0" rIns="0" bIns="0" rtlCol="0" anchor="ctr"/>
-          <a:lstStyle/>
-          <a:p>
-            <a:pPr indent="0" marL="0">
-              <a:buNone/>
-            </a:pPr>
-            <a:r>
-              <a:rPr lang="en-US" sz="1150" b="1" dirty="0">
-                <a:solidFill>
-                  <a:schemeClr val="tx2"/>
-                </a:solidFill>
-              </a:rPr>
-              <a:t>분모를 섞지 않는다</a:t>
-            </a:r>
-            <a:endParaRPr lang="en-US" sz="1150" dirty="0"/>
-          </a:p>
-        </p:txBody>
-      </p:sp>
-      <p:sp>
-        <p:nvSpPr>
-          <p:cNvPr id="13" name="설명 내용 4-3"/>
-          <p:cNvSpPr txBox="1"/>
-          <p:nvPr/>
-        </p:nvSpPr>
-        <p:spPr>
-          <a:xfrm>
-            <a:off x="621792" y="3172968"/>
-            <a:ext cx="3703320" cy="1234440"/>
-          </a:xfrm>
-          <a:prstGeom prst="rect">
-            <a:avLst/>
-          </a:prstGeom>
-          <a:noFill/>
-          <a:ln/>
-        </p:spPr>
-        <p:txBody>
-          <a:bodyPr wrap="square" lIns="0" tIns="0" rIns="0" bIns="0" rtlCol="0" anchor="t">
-            <a:normAutofit/>
-          </a:bodyPr>
-          <a:lstStyle/>
-          <a:p>
-            <a:pPr marL="342900" indent="-342900">
-              <a:spcAft>
-                <a:spcPts val="300"/>
-              </a:spcAft>
-              <a:buSzPct val="100000"/>
-              <a:buChar char="•"/>
-            </a:pPr>
-            <a:r>
-              <a:rPr lang="en-US" sz="1050" dirty="0">
-                <a:solidFill>
-                  <a:schemeClr val="tx1"/>
-                </a:solidFill>
-              </a:rPr>
-              <a:t>유·초·중·고 전체(555.1만)와 초·중·고(501.5만)는 다르다</a:t>
-            </a:r>
-            <a:endParaRPr lang="en-US" sz="1050" dirty="0"/>
-          </a:p>
-          <a:p>
-            <a:pPr marL="342900" indent="-342900">
-              <a:spcAft>
-                <a:spcPts val="300"/>
-              </a:spcAft>
-              <a:buSzPct val="100000"/>
-              <a:buChar char="•"/>
-            </a:pPr>
-            <a:r>
-              <a:rPr lang="en-US" sz="1050" dirty="0">
-                <a:solidFill>
-                  <a:schemeClr val="tx1"/>
-                </a:solidFill>
-              </a:rPr>
-              <a:t>비율의 분모는 초·중·고 학생 수(원자료의 4.0%와 일치)</a:t>
-            </a:r>
-            <a:endParaRPr lang="en-US" sz="1050" dirty="0"/>
-          </a:p>
-        </p:txBody>
-      </p:sp>
-      <p:sp>
-        <p:nvSpPr>
-          <p:cNvPr id="14" name="설명 카드 4-4"/>
-          <p:cNvSpPr/>
-          <p:nvPr/>
-        </p:nvSpPr>
-        <p:spPr>
-          <a:xfrm>
-            <a:off x="4663440" y="2788920"/>
-            <a:ext cx="4023360" cy="1691640"/>
-          </a:xfrm>
-          <a:prstGeom prst="roundRect">
-            <a:avLst>
-              <a:gd name="adj" fmla="val 3243"/>
-            </a:avLst>
-          </a:prstGeom>
-          <a:solidFill>
-            <a:srgbClr val="FFFFFF"/>
-          </a:solidFill>
-          <a:ln w="9525">
-            <a:solidFill>
-              <a:srgbClr val="DCE5DF"/>
-            </a:solidFill>
-            <a:prstDash val="solid"/>
-          </a:ln>
-        </p:spPr>
-      </p:sp>
-      <p:sp>
-        <p:nvSpPr>
-          <p:cNvPr id="15" name="설명 제목 4-4"/>
-          <p:cNvSpPr txBox="1"/>
-          <p:nvPr/>
-        </p:nvSpPr>
-        <p:spPr>
-          <a:xfrm>
-            <a:off x="4828032" y="2880360"/>
-            <a:ext cx="3657600" cy="274320"/>
-          </a:xfrm>
-          <a:prstGeom prst="rect">
-            <a:avLst/>
-          </a:prstGeom>
-          <a:noFill/>
-          <a:ln/>
-        </p:spPr>
-        <p:txBody>
-          <a:bodyPr wrap="square" lIns="0" tIns="0" rIns="0" bIns="0" rtlCol="0" anchor="ctr"/>
-          <a:lstStyle/>
-          <a:p>
-            <a:pPr indent="0" marL="0">
-              <a:buNone/>
-            </a:pPr>
-            <a:r>
-              <a:rPr lang="en-US" sz="1150" b="1" dirty="0">
-                <a:solidFill>
-                  <a:schemeClr val="tx2"/>
-                </a:solidFill>
-              </a:rPr>
-              <a:t>채점 연결</a:t>
-            </a:r>
-            <a:endParaRPr lang="en-US" sz="1150" dirty="0"/>
-          </a:p>
-        </p:txBody>
-      </p:sp>
-      <p:sp>
-        <p:nvSpPr>
-          <p:cNvPr id="16" name="설명 내용 4-4"/>
-          <p:cNvSpPr txBox="1"/>
-          <p:nvPr/>
-        </p:nvSpPr>
-        <p:spPr>
-          <a:xfrm>
-            <a:off x="4828032" y="3172968"/>
-            <a:ext cx="3703320" cy="1234440"/>
-          </a:xfrm>
-          <a:prstGeom prst="rect">
-            <a:avLst/>
-          </a:prstGeom>
-          <a:noFill/>
-          <a:ln/>
-        </p:spPr>
-        <p:txBody>
-          <a:bodyPr wrap="square" lIns="0" tIns="0" rIns="0" bIns="0" rtlCol="0" anchor="t">
-            <a:normAutofit/>
-          </a:bodyPr>
-          <a:lstStyle/>
-          <a:p>
-            <a:pPr marL="342900" indent="-342900">
-              <a:spcAft>
-                <a:spcPts val="300"/>
-              </a:spcAft>
-              <a:buSzPct val="100000"/>
-              <a:buChar char="•"/>
-            </a:pPr>
-            <a:r>
-              <a:rPr lang="en-US" sz="1050" dirty="0">
-                <a:solidFill>
-                  <a:schemeClr val="tx1"/>
-                </a:solidFill>
-              </a:rPr>
-              <a:t>4번 발표 20점: 출처·표·그래프·해석이 모두 나오고 결론이 자세할 때</a:t>
-            </a:r>
-            <a:endParaRPr lang="en-US" sz="1050" dirty="0"/>
-          </a:p>
-          <a:p>
-            <a:pPr marL="342900" indent="-342900">
-              <a:spcAft>
-                <a:spcPts val="300"/>
-              </a:spcAft>
-              <a:buSzPct val="100000"/>
-              <a:buChar char="•"/>
-            </a:pPr>
-            <a:r>
-              <a:rPr lang="en-US" sz="1050" dirty="0">
-                <a:solidFill>
-                  <a:schemeClr val="tx1"/>
-                </a:solidFill>
-              </a:rPr>
-              <a:t>결론이 한 문장이면 15점</a:t>
-            </a:r>
-            <a:endParaRPr lang="en-US" sz="1050" dirty="0"/>
-          </a:p>
-        </p:txBody>
-      </p:sp>
-      <p:sp>
-        <p:nvSpPr>
-          <p:cNvPr id="25" name="Slide Number Placeholder 0"/>
-          <p:cNvSpPr>
-            <a:spLocks noGrp="1"/>
-          </p:cNvSpPr>
-          <p:nvPr>
-            <p:ph type="sldNum" sz="quarter" idx="4294967295"/>
-          </p:nvPr>
-        </p:nvSpPr>
-        <p:spPr>
-          <a:xfrm>
-            <a:off x="8229600" y="4754880"/>
-            <a:ext cx="457200" cy="228600"/>
-          </a:xfrm>
-          <a:prstGeom prst="rect">
-            <a:avLst/>
-          </a:prstGeom>
-          <a:extLst>
-            <a:ext uri="{C572A759-6A51-4108-AA02-DFA0A04FC94B}">
-              <ma14:wrappingTextBoxFlag xmlns:ma14="http://schemas.microsoft.com/office/mac/drawingml/2011/main" val="0"/>
-            </a:ext>
-          </a:extLst>
-        </p:spPr>
-        <p:txBody>
-          <a:bodyPr/>
-          <a:lstStyle>
-            <a:lvl1pPr>
-              <a:defRPr sz="900">
-                <a:solidFill>
-                  <a:srgbClr val="6B6759"/>
-                </a:solidFill>
-              </a:defRPr>
-            </a:lvl1pPr>
-          </a:lstStyle>
-          <a:p>
-            <a:pPr algn="r"/>
-            <a:fld id="{F7021451-1387-4CA6-816F-3879F97B5CBC}" type="slidenum">
-              <a:rPr b="0" lang="en-US"/>
-              <a:t>8</a:t>
+              <a:t>4</a:t>
             </a:fld>
             <a:endParaRPr lang="en-US"/>
           </a:p>
